--- a/slides/Module_10_Design_Reviews.pptx
+++ b/slides/Module_10_Design_Reviews.pptx
@@ -3793,7 +3793,7 @@
                   <a:srgbClr val="FFFFFF"/>
                 </a:solidFill>
               </a:rPr>
-              <a:t>LAB EXERCISE  ·  35 MINUTES</a:t>
+              <a:t>LAB EXERCISE  ·  45 MINUTES  ·  CAPSTONE</a:t>
             </a:r>
             <a:endParaRPr lang="en-US" sz="1300" dirty="0"/>
           </a:p>
@@ -3807,7 +3807,7 @@
         </p:nvSpPr>
         <p:spPr>
           <a:xfrm>
-            <a:off x="365760" y="868680"/>
+            <a:off x="365760" y="822960"/>
             <a:ext cx="8412480" cy="420624"/>
           </a:xfrm>
           <a:prstGeom prst="rect">
@@ -3824,14 +3824,14 @@
               <a:buNone/>
             </a:pPr>
             <a:r>
-              <a:rPr lang="en-US" sz="1900" b="1" dirty="0">
+              <a:rPr lang="en-US" sz="1500" b="1" dirty="0">
                 <a:solidFill>
                   <a:srgbClr val="1C3557"/>
                 </a:solidFill>
               </a:rPr>
-              <a:t>Run a Design Review for Your Agent Workflow</a:t>
-            </a:r>
-            <a:endParaRPr lang="en-US" sz="1900" dirty="0"/>
+              <a:t>Run a Full Design Review (Production) or Apply the Lightweight Subset (Coding Agent Workflow)</a:t>
+            </a:r>
+            <a:endParaRPr lang="en-US" sz="1500" dirty="0"/>
           </a:p>
         </p:txBody>
       </p:sp>
@@ -3843,8 +3843,124 @@
         </p:nvSpPr>
         <p:spPr>
           <a:xfrm>
-            <a:off x="320040" y="1389888"/>
-            <a:ext cx="8503920" cy="795528"/>
+            <a:off x="320040" y="1316736"/>
+            <a:ext cx="4023360" cy="274320"/>
+          </a:xfrm>
+          <a:prstGeom prst="rect">
+            <a:avLst/>
+          </a:prstGeom>
+          <a:solidFill>
+            <a:srgbClr val="4A7FA8">
+              <a:alpha val="85000"/>
+            </a:srgbClr>
+          </a:solidFill>
+          <a:ln/>
+        </p:spPr>
+      </p:sp>
+      <p:sp>
+        <p:nvSpPr>
+          <p:cNvPr id="6" name="Text 4"/>
+          <p:cNvSpPr/>
+          <p:nvPr/>
+        </p:nvSpPr>
+        <p:spPr>
+          <a:xfrm>
+            <a:off x="384048" y="1316736"/>
+            <a:ext cx="3913632" cy="274320"/>
+          </a:xfrm>
+          <a:prstGeom prst="rect">
+            <a:avLst/>
+          </a:prstGeom>
+          <a:noFill/>
+          <a:ln/>
+        </p:spPr>
+        <p:txBody>
+          <a:bodyPr wrap="square" lIns="0" tIns="0" rIns="0" bIns="0" rtlCol="0" anchor="ctr"/>
+          <a:lstStyle/>
+          <a:p>
+            <a:pPr indent="0" marL="0">
+              <a:buNone/>
+            </a:pPr>
+            <a:r>
+              <a:rPr lang="en-US" sz="1000" b="1" dirty="0">
+                <a:solidFill>
+                  <a:srgbClr val="FFFFFF"/>
+                </a:solidFill>
+              </a:rPr>
+              <a:t>Track A: Production agent system — run all 12 checklist items</a:t>
+            </a:r>
+            <a:endParaRPr lang="en-US" sz="1000" dirty="0"/>
+          </a:p>
+        </p:txBody>
+      </p:sp>
+      <p:sp>
+        <p:nvSpPr>
+          <p:cNvPr id="7" name="Shape 5"/>
+          <p:cNvSpPr/>
+          <p:nvPr/>
+        </p:nvSpPr>
+        <p:spPr>
+          <a:xfrm>
+            <a:off x="4480560" y="1316736"/>
+            <a:ext cx="4343400" cy="274320"/>
+          </a:xfrm>
+          <a:prstGeom prst="rect">
+            <a:avLst/>
+          </a:prstGeom>
+          <a:solidFill>
+            <a:srgbClr val="3A7DC9">
+              <a:alpha val="85000"/>
+            </a:srgbClr>
+          </a:solidFill>
+          <a:ln/>
+        </p:spPr>
+      </p:sp>
+      <p:sp>
+        <p:nvSpPr>
+          <p:cNvPr id="8" name="Text 6"/>
+          <p:cNvSpPr/>
+          <p:nvPr/>
+        </p:nvSpPr>
+        <p:spPr>
+          <a:xfrm>
+            <a:off x="4544568" y="1316736"/>
+            <a:ext cx="4206240" cy="274320"/>
+          </a:xfrm>
+          <a:prstGeom prst="rect">
+            <a:avLst/>
+          </a:prstGeom>
+          <a:noFill/>
+          <a:ln/>
+        </p:spPr>
+        <p:txBody>
+          <a:bodyPr wrap="square" lIns="0" tIns="0" rIns="0" bIns="0" rtlCol="0" anchor="ctr"/>
+          <a:lstStyle/>
+          <a:p>
+            <a:pPr indent="0" marL="0">
+              <a:buNone/>
+            </a:pPr>
+            <a:r>
+              <a:rPr lang="en-US" sz="1000" b="1" dirty="0">
+                <a:solidFill>
+                  <a:srgbClr val="FFFFFF"/>
+                </a:solidFill>
+              </a:rPr>
+              <a:t>Track B: Coding agent workflow — items 01, 04, 05, 06, 07, 10 only</a:t>
+            </a:r>
+            <a:endParaRPr lang="en-US" sz="1000" dirty="0"/>
+          </a:p>
+        </p:txBody>
+      </p:sp>
+      <p:sp>
+        <p:nvSpPr>
+          <p:cNvPr id="9" name="Shape 7"/>
+          <p:cNvSpPr/>
+          <p:nvPr/>
+        </p:nvSpPr>
+        <p:spPr>
+          <a:xfrm>
+            <a:off x="320040" y="1682496"/>
+            <a:ext cx="8503920" cy="603504"/>
           </a:xfrm>
           <a:prstGeom prst="rect">
             <a:avLst/>
@@ -3864,14 +3980,14 @@
       </p:sp>
       <p:sp>
         <p:nvSpPr>
-          <p:cNvPr id="6" name="Shape 4"/>
-          <p:cNvSpPr/>
-          <p:nvPr/>
-        </p:nvSpPr>
-        <p:spPr>
-          <a:xfrm>
-            <a:off x="320040" y="1389888"/>
-            <a:ext cx="475488" cy="795528"/>
+          <p:cNvPr id="10" name="Shape 8"/>
+          <p:cNvSpPr/>
+          <p:nvPr/>
+        </p:nvSpPr>
+        <p:spPr>
+          <a:xfrm>
+            <a:off x="320040" y="1682496"/>
+            <a:ext cx="475488" cy="603504"/>
           </a:xfrm>
           <a:prstGeom prst="rect">
             <a:avLst/>
@@ -3884,14 +4000,14 @@
       </p:sp>
       <p:sp>
         <p:nvSpPr>
-          <p:cNvPr id="7" name="Text 5"/>
-          <p:cNvSpPr/>
-          <p:nvPr/>
-        </p:nvSpPr>
-        <p:spPr>
-          <a:xfrm>
-            <a:off x="320040" y="1389888"/>
-            <a:ext cx="475488" cy="795528"/>
+          <p:cNvPr id="11" name="Text 9"/>
+          <p:cNvSpPr/>
+          <p:nvPr/>
+        </p:nvSpPr>
+        <p:spPr>
+          <a:xfrm>
+            <a:off x="320040" y="1682496"/>
+            <a:ext cx="475488" cy="603504"/>
           </a:xfrm>
           <a:prstGeom prst="rect">
             <a:avLst/>
@@ -3907,63 +4023,63 @@
               <a:buNone/>
             </a:pPr>
             <a:r>
-              <a:rPr lang="en-US" sz="2200" b="1" dirty="0">
+              <a:rPr lang="en-US" sz="2000" b="1" dirty="0">
                 <a:solidFill>
                   <a:srgbClr val="FFFFFF"/>
                 </a:solidFill>
               </a:rPr>
               <a:t>1</a:t>
             </a:r>
-            <a:endParaRPr lang="en-US" sz="2200" dirty="0"/>
-          </a:p>
-        </p:txBody>
-      </p:sp>
-      <p:sp>
-        <p:nvSpPr>
-          <p:cNvPr id="8" name="Text 6"/>
-          <p:cNvSpPr/>
-          <p:nvPr/>
-        </p:nvSpPr>
-        <p:spPr>
-          <a:xfrm>
-            <a:off x="886968" y="1444752"/>
-            <a:ext cx="2286000" cy="292608"/>
-          </a:xfrm>
-          <a:prstGeom prst="rect">
-            <a:avLst/>
-          </a:prstGeom>
-          <a:noFill/>
-          <a:ln/>
-        </p:spPr>
-        <p:txBody>
-          <a:bodyPr wrap="square" lIns="0" tIns="0" rIns="0" bIns="0" rtlCol="0" anchor="ctr"/>
-          <a:lstStyle/>
-          <a:p>
-            <a:pPr indent="0" marL="0">
-              <a:buNone/>
-            </a:pPr>
-            <a:r>
-              <a:rPr lang="en-US" sz="1300" b="1" dirty="0">
+            <a:endParaRPr lang="en-US" sz="2000" dirty="0"/>
+          </a:p>
+        </p:txBody>
+      </p:sp>
+      <p:sp>
+        <p:nvSpPr>
+          <p:cNvPr id="12" name="Text 10"/>
+          <p:cNvSpPr/>
+          <p:nvPr/>
+        </p:nvSpPr>
+        <p:spPr>
+          <a:xfrm>
+            <a:off x="886968" y="1719072"/>
+            <a:ext cx="2468880" cy="237744"/>
+          </a:xfrm>
+          <a:prstGeom prst="rect">
+            <a:avLst/>
+          </a:prstGeom>
+          <a:noFill/>
+          <a:ln/>
+        </p:spPr>
+        <p:txBody>
+          <a:bodyPr wrap="square" lIns="0" tIns="0" rIns="0" bIns="0" rtlCol="0" anchor="ctr"/>
+          <a:lstStyle/>
+          <a:p>
+            <a:pPr indent="0" marL="0">
+              <a:buNone/>
+            </a:pPr>
+            <a:r>
+              <a:rPr lang="en-US" sz="1250" b="1" dirty="0">
                 <a:solidFill>
                   <a:srgbClr val="4A7FA8"/>
                 </a:solidFill>
               </a:rPr>
-              <a:t>Rate your current maturity</a:t>
-            </a:r>
-            <a:endParaRPr lang="en-US" sz="1300" dirty="0"/>
-          </a:p>
-        </p:txBody>
-      </p:sp>
-      <p:sp>
-        <p:nvSpPr>
-          <p:cNvPr id="9" name="Text 7"/>
-          <p:cNvSpPr/>
-          <p:nvPr/>
-        </p:nvSpPr>
-        <p:spPr>
-          <a:xfrm>
-            <a:off x="3172968" y="1444752"/>
-            <a:ext cx="731520" cy="292608"/>
+              <a:t>Finalise your architecture</a:t>
+            </a:r>
+            <a:endParaRPr lang="en-US" sz="1250" dirty="0"/>
+          </a:p>
+        </p:txBody>
+      </p:sp>
+      <p:sp>
+        <p:nvSpPr>
+          <p:cNvPr id="13" name="Text 11"/>
+          <p:cNvSpPr/>
+          <p:nvPr/>
+        </p:nvSpPr>
+        <p:spPr>
+          <a:xfrm>
+            <a:off x="3355848" y="1719072"/>
+            <a:ext cx="731520" cy="237744"/>
           </a:xfrm>
           <a:prstGeom prst="rect">
             <a:avLst/>
@@ -3984,7 +4100,7 @@
                   <a:srgbClr val="7A90A8"/>
                 </a:solidFill>
               </a:rPr>
-              <a:t>(5 min)</a:t>
+              <a:t>(10 min)</a:t>
             </a:r>
             <a:endParaRPr lang="en-US" sz="1100" dirty="0"/>
           </a:p>
@@ -3992,50 +4108,50 @@
       </p:sp>
       <p:sp>
         <p:nvSpPr>
-          <p:cNvPr id="10" name="Text 8"/>
-          <p:cNvSpPr/>
-          <p:nvPr/>
-        </p:nvSpPr>
-        <p:spPr>
-          <a:xfrm>
-            <a:off x="886968" y="1810512"/>
-            <a:ext cx="7818120" cy="310896"/>
-          </a:xfrm>
-          <a:prstGeom prst="rect">
-            <a:avLst/>
-          </a:prstGeom>
-          <a:noFill/>
-          <a:ln/>
-        </p:spPr>
-        <p:txBody>
-          <a:bodyPr wrap="square" lIns="0" tIns="0" rIns="0" bIns="0" rtlCol="0" anchor="ctr"/>
-          <a:lstStyle/>
-          <a:p>
-            <a:pPr indent="0" marL="0">
-              <a:buNone/>
-            </a:pPr>
-            <a:r>
-              <a:rPr lang="en-US" sz="1100" dirty="0">
+          <p:cNvPr id="14" name="Text 12"/>
+          <p:cNvSpPr/>
+          <p:nvPr/>
+        </p:nvSpPr>
+        <p:spPr>
+          <a:xfrm>
+            <a:off x="886968" y="1993392"/>
+            <a:ext cx="7818120" cy="256032"/>
+          </a:xfrm>
+          <a:prstGeom prst="rect">
+            <a:avLst/>
+          </a:prstGeom>
+          <a:noFill/>
+          <a:ln/>
+        </p:spPr>
+        <p:txBody>
+          <a:bodyPr wrap="square" lIns="0" tIns="0" rIns="0" bIns="0" rtlCol="0" anchor="ctr"/>
+          <a:lstStyle/>
+          <a:p>
+            <a:pPr indent="0" marL="0">
+              <a:buNone/>
+            </a:pPr>
+            <a:r>
+              <a:rPr lang="en-US" sz="1050" dirty="0">
                 <a:solidFill>
                   <a:srgbClr val="7A90A8"/>
                 </a:solidFill>
               </a:rPr>
-              <a:t>Use the maturity model on slide 10. Where is your team today across each of the four dimensions: Architecture, AX, Security, FinOps? Be honest.</a:t>
-            </a:r>
-            <a:endParaRPr lang="en-US" sz="1100" dirty="0"/>
-          </a:p>
-        </p:txBody>
-      </p:sp>
-      <p:sp>
-        <p:nvSpPr>
-          <p:cNvPr id="11" name="Shape 9"/>
-          <p:cNvSpPr/>
-          <p:nvPr/>
-        </p:nvSpPr>
-        <p:spPr>
-          <a:xfrm>
-            <a:off x="320040" y="2276856"/>
-            <a:ext cx="8503920" cy="795528"/>
+              <a:t>Draw the complete system: orchestrator/subagents, tools, memory, context sources, HITL gates, kill switch, budget model. For coding-agent track: map your CLAUDE.md, skills, verifier loop, and HITL points.</a:t>
+            </a:r>
+            <a:endParaRPr lang="en-US" sz="1050" dirty="0"/>
+          </a:p>
+        </p:txBody>
+      </p:sp>
+      <p:sp>
+        <p:nvSpPr>
+          <p:cNvPr id="15" name="Shape 13"/>
+          <p:cNvSpPr/>
+          <p:nvPr/>
+        </p:nvSpPr>
+        <p:spPr>
+          <a:xfrm>
+            <a:off x="320040" y="2359152"/>
+            <a:ext cx="8503920" cy="603504"/>
           </a:xfrm>
           <a:prstGeom prst="rect">
             <a:avLst/>
@@ -4055,14 +4171,14 @@
       </p:sp>
       <p:sp>
         <p:nvSpPr>
-          <p:cNvPr id="12" name="Shape 10"/>
-          <p:cNvSpPr/>
-          <p:nvPr/>
-        </p:nvSpPr>
-        <p:spPr>
-          <a:xfrm>
-            <a:off x="320040" y="2276856"/>
-            <a:ext cx="475488" cy="795528"/>
+          <p:cNvPr id="16" name="Shape 14"/>
+          <p:cNvSpPr/>
+          <p:nvPr/>
+        </p:nvSpPr>
+        <p:spPr>
+          <a:xfrm>
+            <a:off x="320040" y="2359152"/>
+            <a:ext cx="475488" cy="603504"/>
           </a:xfrm>
           <a:prstGeom prst="rect">
             <a:avLst/>
@@ -4075,14 +4191,14 @@
       </p:sp>
       <p:sp>
         <p:nvSpPr>
-          <p:cNvPr id="13" name="Text 11"/>
-          <p:cNvSpPr/>
-          <p:nvPr/>
-        </p:nvSpPr>
-        <p:spPr>
-          <a:xfrm>
-            <a:off x="320040" y="2276856"/>
-            <a:ext cx="475488" cy="795528"/>
+          <p:cNvPr id="17" name="Text 15"/>
+          <p:cNvSpPr/>
+          <p:nvPr/>
+        </p:nvSpPr>
+        <p:spPr>
+          <a:xfrm>
+            <a:off x="320040" y="2359152"/>
+            <a:ext cx="475488" cy="603504"/>
           </a:xfrm>
           <a:prstGeom prst="rect">
             <a:avLst/>
@@ -4098,63 +4214,63 @@
               <a:buNone/>
             </a:pPr>
             <a:r>
-              <a:rPr lang="en-US" sz="2200" b="1" dirty="0">
+              <a:rPr lang="en-US" sz="2000" b="1" dirty="0">
                 <a:solidFill>
                   <a:srgbClr val="FFFFFF"/>
                 </a:solidFill>
               </a:rPr>
               <a:t>2</a:t>
             </a:r>
-            <a:endParaRPr lang="en-US" sz="2200" dirty="0"/>
-          </a:p>
-        </p:txBody>
-      </p:sp>
-      <p:sp>
-        <p:nvSpPr>
-          <p:cNvPr id="14" name="Text 12"/>
-          <p:cNvSpPr/>
-          <p:nvPr/>
-        </p:nvSpPr>
-        <p:spPr>
-          <a:xfrm>
-            <a:off x="886968" y="2331720"/>
-            <a:ext cx="2286000" cy="292608"/>
-          </a:xfrm>
-          <a:prstGeom prst="rect">
-            <a:avLst/>
-          </a:prstGeom>
-          <a:noFill/>
-          <a:ln/>
-        </p:spPr>
-        <p:txBody>
-          <a:bodyPr wrap="square" lIns="0" tIns="0" rIns="0" bIns="0" rtlCol="0" anchor="ctr"/>
-          <a:lstStyle/>
-          <a:p>
-            <a:pPr indent="0" marL="0">
-              <a:buNone/>
-            </a:pPr>
-            <a:r>
-              <a:rPr lang="en-US" sz="1300" b="1" dirty="0">
+            <a:endParaRPr lang="en-US" sz="2000" dirty="0"/>
+          </a:p>
+        </p:txBody>
+      </p:sp>
+      <p:sp>
+        <p:nvSpPr>
+          <p:cNvPr id="18" name="Text 16"/>
+          <p:cNvSpPr/>
+          <p:nvPr/>
+        </p:nvSpPr>
+        <p:spPr>
+          <a:xfrm>
+            <a:off x="886968" y="2395728"/>
+            <a:ext cx="2468880" cy="237744"/>
+          </a:xfrm>
+          <a:prstGeom prst="rect">
+            <a:avLst/>
+          </a:prstGeom>
+          <a:noFill/>
+          <a:ln/>
+        </p:spPr>
+        <p:txBody>
+          <a:bodyPr wrap="square" lIns="0" tIns="0" rIns="0" bIns="0" rtlCol="0" anchor="ctr"/>
+          <a:lstStyle/>
+          <a:p>
+            <a:pPr indent="0" marL="0">
+              <a:buNone/>
+            </a:pPr>
+            <a:r>
+              <a:rPr lang="en-US" sz="1250" b="1" dirty="0">
                 <a:solidFill>
                   <a:srgbClr val="4A7FA8"/>
                 </a:solidFill>
               </a:rPr>
-              <a:t>Run the design review</a:t>
-            </a:r>
-            <a:endParaRPr lang="en-US" sz="1300" dirty="0"/>
-          </a:p>
-        </p:txBody>
-      </p:sp>
-      <p:sp>
-        <p:nvSpPr>
-          <p:cNvPr id="15" name="Text 13"/>
-          <p:cNvSpPr/>
-          <p:nvPr/>
-        </p:nvSpPr>
-        <p:spPr>
-          <a:xfrm>
-            <a:off x="3172968" y="2331720"/>
-            <a:ext cx="731520" cy="292608"/>
+              <a:t>Run the checklist</a:t>
+            </a:r>
+            <a:endParaRPr lang="en-US" sz="1250" dirty="0"/>
+          </a:p>
+        </p:txBody>
+      </p:sp>
+      <p:sp>
+        <p:nvSpPr>
+          <p:cNvPr id="19" name="Text 17"/>
+          <p:cNvSpPr/>
+          <p:nvPr/>
+        </p:nvSpPr>
+        <p:spPr>
+          <a:xfrm>
+            <a:off x="3355848" y="2395728"/>
+            <a:ext cx="731520" cy="237744"/>
           </a:xfrm>
           <a:prstGeom prst="rect">
             <a:avLst/>
@@ -4175,7 +4291,7 @@
                   <a:srgbClr val="7A90A8"/>
                 </a:solidFill>
               </a:rPr>
-              <a:t>(15 min)</a:t>
+              <a:t>(12 min)</a:t>
             </a:r>
             <a:endParaRPr lang="en-US" sz="1100" dirty="0"/>
           </a:p>
@@ -4183,50 +4299,50 @@
       </p:sp>
       <p:sp>
         <p:nvSpPr>
-          <p:cNvPr id="16" name="Text 14"/>
-          <p:cNvSpPr/>
-          <p:nvPr/>
-        </p:nvSpPr>
-        <p:spPr>
-          <a:xfrm>
-            <a:off x="886968" y="2697480"/>
-            <a:ext cx="7818120" cy="310896"/>
-          </a:xfrm>
-          <a:prstGeom prst="rect">
-            <a:avLst/>
-          </a:prstGeom>
-          <a:noFill/>
-          <a:ln/>
-        </p:spPr>
-        <p:txBody>
-          <a:bodyPr wrap="square" lIns="0" tIns="0" rIns="0" bIns="0" rtlCol="0" anchor="ctr"/>
-          <a:lstStyle/>
-          <a:p>
-            <a:pPr indent="0" marL="0">
-              <a:buNone/>
-            </a:pPr>
-            <a:r>
-              <a:rPr lang="en-US" sz="1100" dirty="0">
+          <p:cNvPr id="20" name="Text 18"/>
+          <p:cNvSpPr/>
+          <p:nvPr/>
+        </p:nvSpPr>
+        <p:spPr>
+          <a:xfrm>
+            <a:off x="886968" y="2670048"/>
+            <a:ext cx="7818120" cy="256032"/>
+          </a:xfrm>
+          <a:prstGeom prst="rect">
+            <a:avLst/>
+          </a:prstGeom>
+          <a:noFill/>
+          <a:ln/>
+        </p:spPr>
+        <p:txBody>
+          <a:bodyPr wrap="square" lIns="0" tIns="0" rIns="0" bIns="0" rtlCol="0" anchor="ctr"/>
+          <a:lstStyle/>
+          <a:p>
+            <a:pPr indent="0" marL="0">
+              <a:buNone/>
+            </a:pPr>
+            <a:r>
+              <a:rPr lang="en-US" sz="1050" dirty="0">
                 <a:solidFill>
                   <a:srgbClr val="7A90A8"/>
                 </a:solidFill>
               </a:rPr>
-              <a:t>Use the slide 7 checklist for the agent workflow you’ve designed in this programme. Work through all 24 questions. Identify every unchecked box. Group: which gaps are blockers vs nice-to-have?</a:t>
-            </a:r>
-            <a:endParaRPr lang="en-US" sz="1100" dirty="0"/>
-          </a:p>
-        </p:txBody>
-      </p:sp>
-      <p:sp>
-        <p:nvSpPr>
-          <p:cNvPr id="17" name="Shape 15"/>
-          <p:cNvSpPr/>
-          <p:nvPr/>
-        </p:nvSpPr>
-        <p:spPr>
-          <a:xfrm>
-            <a:off x="320040" y="3163824"/>
-            <a:ext cx="8503920" cy="795528"/>
+              <a:t>Work through every applicable checklist item: ✓ Pass, ⚠ Partial, ✗ Gap. Document every gap with an owner and timeline. Production track: all 12. Coding-agent track: items 01, 04, 05, 06, 07, 10.</a:t>
+            </a:r>
+            <a:endParaRPr lang="en-US" sz="1050" dirty="0"/>
+          </a:p>
+        </p:txBody>
+      </p:sp>
+      <p:sp>
+        <p:nvSpPr>
+          <p:cNvPr id="21" name="Shape 19"/>
+          <p:cNvSpPr/>
+          <p:nvPr/>
+        </p:nvSpPr>
+        <p:spPr>
+          <a:xfrm>
+            <a:off x="320040" y="3035808"/>
+            <a:ext cx="8503920" cy="603504"/>
           </a:xfrm>
           <a:prstGeom prst="rect">
             <a:avLst/>
@@ -4246,14 +4362,14 @@
       </p:sp>
       <p:sp>
         <p:nvSpPr>
-          <p:cNvPr id="18" name="Shape 16"/>
-          <p:cNvSpPr/>
-          <p:nvPr/>
-        </p:nvSpPr>
-        <p:spPr>
-          <a:xfrm>
-            <a:off x="320040" y="3163824"/>
-            <a:ext cx="475488" cy="795528"/>
+          <p:cNvPr id="22" name="Shape 20"/>
+          <p:cNvSpPr/>
+          <p:nvPr/>
+        </p:nvSpPr>
+        <p:spPr>
+          <a:xfrm>
+            <a:off x="320040" y="3035808"/>
+            <a:ext cx="475488" cy="603504"/>
           </a:xfrm>
           <a:prstGeom prst="rect">
             <a:avLst/>
@@ -4266,14 +4382,14 @@
       </p:sp>
       <p:sp>
         <p:nvSpPr>
-          <p:cNvPr id="19" name="Text 17"/>
-          <p:cNvSpPr/>
-          <p:nvPr/>
-        </p:nvSpPr>
-        <p:spPr>
-          <a:xfrm>
-            <a:off x="320040" y="3163824"/>
-            <a:ext cx="475488" cy="795528"/>
+          <p:cNvPr id="23" name="Text 21"/>
+          <p:cNvSpPr/>
+          <p:nvPr/>
+        </p:nvSpPr>
+        <p:spPr>
+          <a:xfrm>
+            <a:off x="320040" y="3035808"/>
+            <a:ext cx="475488" cy="603504"/>
           </a:xfrm>
           <a:prstGeom prst="rect">
             <a:avLst/>
@@ -4289,63 +4405,63 @@
               <a:buNone/>
             </a:pPr>
             <a:r>
-              <a:rPr lang="en-US" sz="2200" b="1" dirty="0">
+              <a:rPr lang="en-US" sz="2000" b="1" dirty="0">
                 <a:solidFill>
                   <a:srgbClr val="FFFFFF"/>
                 </a:solidFill>
               </a:rPr>
               <a:t>3</a:t>
             </a:r>
-            <a:endParaRPr lang="en-US" sz="2200" dirty="0"/>
-          </a:p>
-        </p:txBody>
-      </p:sp>
-      <p:sp>
-        <p:nvSpPr>
-          <p:cNvPr id="20" name="Text 18"/>
-          <p:cNvSpPr/>
-          <p:nvPr/>
-        </p:nvSpPr>
-        <p:spPr>
-          <a:xfrm>
-            <a:off x="886968" y="3218688"/>
-            <a:ext cx="2286000" cy="292608"/>
-          </a:xfrm>
-          <a:prstGeom prst="rect">
-            <a:avLst/>
-          </a:prstGeom>
-          <a:noFill/>
-          <a:ln/>
-        </p:spPr>
-        <p:txBody>
-          <a:bodyPr wrap="square" lIns="0" tIns="0" rIns="0" bIns="0" rtlCol="0" anchor="ctr"/>
-          <a:lstStyle/>
-          <a:p>
-            <a:pPr indent="0" marL="0">
-              <a:buNone/>
-            </a:pPr>
-            <a:r>
-              <a:rPr lang="en-US" sz="1300" b="1" dirty="0">
+            <a:endParaRPr lang="en-US" sz="2000" dirty="0"/>
+          </a:p>
+        </p:txBody>
+      </p:sp>
+      <p:sp>
+        <p:nvSpPr>
+          <p:cNvPr id="24" name="Text 22"/>
+          <p:cNvSpPr/>
+          <p:nvPr/>
+        </p:nvSpPr>
+        <p:spPr>
+          <a:xfrm>
+            <a:off x="886968" y="3072384"/>
+            <a:ext cx="2468880" cy="237744"/>
+          </a:xfrm>
+          <a:prstGeom prst="rect">
+            <a:avLst/>
+          </a:prstGeom>
+          <a:noFill/>
+          <a:ln/>
+        </p:spPr>
+        <p:txBody>
+          <a:bodyPr wrap="square" lIns="0" tIns="0" rIns="0" bIns="0" rtlCol="0" anchor="ctr"/>
+          <a:lstStyle/>
+          <a:p>
+            <a:pPr indent="0" marL="0">
+              <a:buNone/>
+            </a:pPr>
+            <a:r>
+              <a:rPr lang="en-US" sz="1250" b="1" dirty="0">
                 <a:solidFill>
                   <a:srgbClr val="4A7FA8"/>
                 </a:solidFill>
               </a:rPr>
               <a:t>Write one ADR</a:t>
             </a:r>
-            <a:endParaRPr lang="en-US" sz="1300" dirty="0"/>
-          </a:p>
-        </p:txBody>
-      </p:sp>
-      <p:sp>
-        <p:nvSpPr>
-          <p:cNvPr id="21" name="Text 19"/>
-          <p:cNvSpPr/>
-          <p:nvPr/>
-        </p:nvSpPr>
-        <p:spPr>
-          <a:xfrm>
-            <a:off x="3172968" y="3218688"/>
-            <a:ext cx="731520" cy="292608"/>
+            <a:endParaRPr lang="en-US" sz="1250" dirty="0"/>
+          </a:p>
+        </p:txBody>
+      </p:sp>
+      <p:sp>
+        <p:nvSpPr>
+          <p:cNvPr id="25" name="Text 23"/>
+          <p:cNvSpPr/>
+          <p:nvPr/>
+        </p:nvSpPr>
+        <p:spPr>
+          <a:xfrm>
+            <a:off x="3355848" y="3072384"/>
+            <a:ext cx="731520" cy="237744"/>
           </a:xfrm>
           <a:prstGeom prst="rect">
             <a:avLst/>
@@ -4374,50 +4490,50 @@
       </p:sp>
       <p:sp>
         <p:nvSpPr>
-          <p:cNvPr id="22" name="Text 20"/>
-          <p:cNvSpPr/>
-          <p:nvPr/>
-        </p:nvSpPr>
-        <p:spPr>
-          <a:xfrm>
-            <a:off x="886968" y="3584448"/>
-            <a:ext cx="7818120" cy="310896"/>
-          </a:xfrm>
-          <a:prstGeom prst="rect">
-            <a:avLst/>
-          </a:prstGeom>
-          <a:noFill/>
-          <a:ln/>
-        </p:spPr>
-        <p:txBody>
-          <a:bodyPr wrap="square" lIns="0" tIns="0" rIns="0" bIns="0" rtlCol="0" anchor="ctr"/>
-          <a:lstStyle/>
-          <a:p>
-            <a:pPr indent="0" marL="0">
-              <a:buNone/>
-            </a:pPr>
-            <a:r>
-              <a:rPr lang="en-US" sz="1100" dirty="0">
+          <p:cNvPr id="26" name="Text 24"/>
+          <p:cNvSpPr/>
+          <p:nvPr/>
+        </p:nvSpPr>
+        <p:spPr>
+          <a:xfrm>
+            <a:off x="886968" y="3346704"/>
+            <a:ext cx="7818120" cy="256032"/>
+          </a:xfrm>
+          <a:prstGeom prst="rect">
+            <a:avLst/>
+          </a:prstGeom>
+          <a:noFill/>
+          <a:ln/>
+        </p:spPr>
+        <p:txBody>
+          <a:bodyPr wrap="square" lIns="0" tIns="0" rIns="0" bIns="0" rtlCol="0" anchor="ctr"/>
+          <a:lstStyle/>
+          <a:p>
+            <a:pPr indent="0" marL="0">
+              <a:buNone/>
+            </a:pPr>
+            <a:r>
+              <a:rPr lang="en-US" sz="1050" dirty="0">
                 <a:solidFill>
                   <a:srgbClr val="7A90A8"/>
                 </a:solidFill>
               </a:rPr>
-              <a:t>Identify the most significant architectural decision in your agent design. Write a 1-page ADR using the template: Context, Decision, Consequences. Swap with a neighbour: could an agent use this to understand what NOT to change?</a:t>
-            </a:r>
-            <a:endParaRPr lang="en-US" sz="1100" dirty="0"/>
-          </a:p>
-        </p:txBody>
-      </p:sp>
-      <p:sp>
-        <p:nvSpPr>
-          <p:cNvPr id="23" name="Shape 21"/>
-          <p:cNvSpPr/>
-          <p:nvPr/>
-        </p:nvSpPr>
-        <p:spPr>
-          <a:xfrm>
-            <a:off x="320040" y="4050792"/>
-            <a:ext cx="8503920" cy="795528"/>
+              <a:t>Identify the single most important architectural decision in your system. Write a full ADR: Context, Decision, Consequences. It must be specific, consequential, and irreversible. Swap with a neighbour.</a:t>
+            </a:r>
+            <a:endParaRPr lang="en-US" sz="1050" dirty="0"/>
+          </a:p>
+        </p:txBody>
+      </p:sp>
+      <p:sp>
+        <p:nvSpPr>
+          <p:cNvPr id="27" name="Shape 25"/>
+          <p:cNvSpPr/>
+          <p:nvPr/>
+        </p:nvSpPr>
+        <p:spPr>
+          <a:xfrm>
+            <a:off x="320040" y="3712464"/>
+            <a:ext cx="8503920" cy="603504"/>
           </a:xfrm>
           <a:prstGeom prst="rect">
             <a:avLst/>
@@ -4437,14 +4553,14 @@
       </p:sp>
       <p:sp>
         <p:nvSpPr>
-          <p:cNvPr id="24" name="Shape 22"/>
-          <p:cNvSpPr/>
-          <p:nvPr/>
-        </p:nvSpPr>
-        <p:spPr>
-          <a:xfrm>
-            <a:off x="320040" y="4050792"/>
-            <a:ext cx="475488" cy="795528"/>
+          <p:cNvPr id="28" name="Shape 26"/>
+          <p:cNvSpPr/>
+          <p:nvPr/>
+        </p:nvSpPr>
+        <p:spPr>
+          <a:xfrm>
+            <a:off x="320040" y="3712464"/>
+            <a:ext cx="475488" cy="603504"/>
           </a:xfrm>
           <a:prstGeom prst="rect">
             <a:avLst/>
@@ -4457,14 +4573,14 @@
       </p:sp>
       <p:sp>
         <p:nvSpPr>
-          <p:cNvPr id="25" name="Text 23"/>
-          <p:cNvSpPr/>
-          <p:nvPr/>
-        </p:nvSpPr>
-        <p:spPr>
-          <a:xfrm>
-            <a:off x="320040" y="4050792"/>
-            <a:ext cx="475488" cy="795528"/>
+          <p:cNvPr id="29" name="Text 27"/>
+          <p:cNvSpPr/>
+          <p:nvPr/>
+        </p:nvSpPr>
+        <p:spPr>
+          <a:xfrm>
+            <a:off x="320040" y="3712464"/>
+            <a:ext cx="475488" cy="603504"/>
           </a:xfrm>
           <a:prstGeom prst="rect">
             <a:avLst/>
@@ -4480,63 +4596,63 @@
               <a:buNone/>
             </a:pPr>
             <a:r>
-              <a:rPr lang="en-US" sz="2200" b="1" dirty="0">
+              <a:rPr lang="en-US" sz="2000" b="1" dirty="0">
                 <a:solidFill>
                   <a:srgbClr val="FFFFFF"/>
                 </a:solidFill>
               </a:rPr>
               <a:t>4</a:t>
             </a:r>
-            <a:endParaRPr lang="en-US" sz="2200" dirty="0"/>
-          </a:p>
-        </p:txBody>
-      </p:sp>
-      <p:sp>
-        <p:nvSpPr>
-          <p:cNvPr id="26" name="Text 24"/>
-          <p:cNvSpPr/>
-          <p:nvPr/>
-        </p:nvSpPr>
-        <p:spPr>
-          <a:xfrm>
-            <a:off x="886968" y="4105656"/>
-            <a:ext cx="2286000" cy="292608"/>
-          </a:xfrm>
-          <a:prstGeom prst="rect">
-            <a:avLst/>
-          </a:prstGeom>
-          <a:noFill/>
-          <a:ln/>
-        </p:spPr>
-        <p:txBody>
-          <a:bodyPr wrap="square" lIns="0" tIns="0" rIns="0" bIns="0" rtlCol="0" anchor="ctr"/>
-          <a:lstStyle/>
-          <a:p>
-            <a:pPr indent="0" marL="0">
-              <a:buNone/>
-            </a:pPr>
-            <a:r>
-              <a:rPr lang="en-US" sz="1300" b="1" dirty="0">
+            <a:endParaRPr lang="en-US" sz="2000" dirty="0"/>
+          </a:p>
+        </p:txBody>
+      </p:sp>
+      <p:sp>
+        <p:nvSpPr>
+          <p:cNvPr id="30" name="Text 28"/>
+          <p:cNvSpPr/>
+          <p:nvPr/>
+        </p:nvSpPr>
+        <p:spPr>
+          <a:xfrm>
+            <a:off x="886968" y="3749040"/>
+            <a:ext cx="2468880" cy="237744"/>
+          </a:xfrm>
+          <a:prstGeom prst="rect">
+            <a:avLst/>
+          </a:prstGeom>
+          <a:noFill/>
+          <a:ln/>
+        </p:spPr>
+        <p:txBody>
+          <a:bodyPr wrap="square" lIns="0" tIns="0" rIns="0" bIns="0" rtlCol="0" anchor="ctr"/>
+          <a:lstStyle/>
+          <a:p>
+            <a:pPr indent="0" marL="0">
+              <a:buNone/>
+            </a:pPr>
+            <a:r>
+              <a:rPr lang="en-US" sz="1250" b="1" dirty="0">
                 <a:solidFill>
                   <a:srgbClr val="4A7FA8"/>
                 </a:solidFill>
               </a:rPr>
-              <a:t>AX audit</a:t>
-            </a:r>
-            <a:endParaRPr lang="en-US" sz="1300" dirty="0"/>
-          </a:p>
-        </p:txBody>
-      </p:sp>
-      <p:sp>
-        <p:nvSpPr>
-          <p:cNvPr id="27" name="Text 25"/>
-          <p:cNvSpPr/>
-          <p:nvPr/>
-        </p:nvSpPr>
-        <p:spPr>
-          <a:xfrm>
-            <a:off x="3172968" y="4105656"/>
-            <a:ext cx="731520" cy="292608"/>
+              <a:t>Threat model + FinOps</a:t>
+            </a:r>
+            <a:endParaRPr lang="en-US" sz="1250" dirty="0"/>
+          </a:p>
+        </p:txBody>
+      </p:sp>
+      <p:sp>
+        <p:nvSpPr>
+          <p:cNvPr id="31" name="Text 29"/>
+          <p:cNvSpPr/>
+          <p:nvPr/>
+        </p:nvSpPr>
+        <p:spPr>
+          <a:xfrm>
+            <a:off x="3355848" y="3749040"/>
+            <a:ext cx="731520" cy="237744"/>
           </a:xfrm>
           <a:prstGeom prst="rect">
             <a:avLst/>
@@ -4557,6 +4673,197 @@
                   <a:srgbClr val="7A90A8"/>
                 </a:solidFill>
               </a:rPr>
+              <a:t>(8 min)</a:t>
+            </a:r>
+            <a:endParaRPr lang="en-US" sz="1100" dirty="0"/>
+          </a:p>
+        </p:txBody>
+      </p:sp>
+      <p:sp>
+        <p:nvSpPr>
+          <p:cNvPr id="32" name="Text 30"/>
+          <p:cNvSpPr/>
+          <p:nvPr/>
+        </p:nvSpPr>
+        <p:spPr>
+          <a:xfrm>
+            <a:off x="886968" y="4023360"/>
+            <a:ext cx="7818120" cy="256032"/>
+          </a:xfrm>
+          <a:prstGeom prst="rect">
+            <a:avLst/>
+          </a:prstGeom>
+          <a:noFill/>
+          <a:ln/>
+        </p:spPr>
+        <p:txBody>
+          <a:bodyPr wrap="square" lIns="0" tIns="0" rIns="0" bIns="0" rtlCol="0" anchor="ctr"/>
+          <a:lstStyle/>
+          <a:p>
+            <a:pPr indent="0" marL="0">
+              <a:buNone/>
+            </a:pPr>
+            <a:r>
+              <a:rPr lang="en-US" sz="1050" dirty="0">
+                <a:solidFill>
+                  <a:srgbClr val="7A90A8"/>
+                </a:solidFill>
+              </a:rPr>
+              <a:t>Identify your top 3 OWASP threats with mitigations and owners. Estimate $/day at 1,000 runs. Identify the highest-ROI cost optimisation lever. (Coding-agent track: estimate cost-per-session and set a budget cap.)</a:t>
+            </a:r>
+            <a:endParaRPr lang="en-US" sz="1050" dirty="0"/>
+          </a:p>
+        </p:txBody>
+      </p:sp>
+      <p:sp>
+        <p:nvSpPr>
+          <p:cNvPr id="33" name="Shape 31"/>
+          <p:cNvSpPr/>
+          <p:nvPr/>
+        </p:nvSpPr>
+        <p:spPr>
+          <a:xfrm>
+            <a:off x="320040" y="4389120"/>
+            <a:ext cx="8503920" cy="603504"/>
+          </a:xfrm>
+          <a:prstGeom prst="rect">
+            <a:avLst/>
+          </a:prstGeom>
+          <a:solidFill>
+            <a:srgbClr val="F3F6F9"/>
+          </a:solidFill>
+          <a:ln/>
+          <a:effectLst>
+            <a:outerShdw sx="100000" sy="100000" kx="0" ky="0" algn="bl" rotWithShape="0" blurRad="101600" dist="38100" dir="8100000">
+              <a:srgbClr val="000000">
+                <a:alpha val="13000"/>
+              </a:srgbClr>
+            </a:outerShdw>
+          </a:effectLst>
+        </p:spPr>
+      </p:sp>
+      <p:sp>
+        <p:nvSpPr>
+          <p:cNvPr id="34" name="Shape 32"/>
+          <p:cNvSpPr/>
+          <p:nvPr/>
+        </p:nvSpPr>
+        <p:spPr>
+          <a:xfrm>
+            <a:off x="320040" y="4389120"/>
+            <a:ext cx="475488" cy="603504"/>
+          </a:xfrm>
+          <a:prstGeom prst="rect">
+            <a:avLst/>
+          </a:prstGeom>
+          <a:solidFill>
+            <a:srgbClr val="4A7FA8"/>
+          </a:solidFill>
+          <a:ln/>
+        </p:spPr>
+      </p:sp>
+      <p:sp>
+        <p:nvSpPr>
+          <p:cNvPr id="35" name="Text 33"/>
+          <p:cNvSpPr/>
+          <p:nvPr/>
+        </p:nvSpPr>
+        <p:spPr>
+          <a:xfrm>
+            <a:off x="320040" y="4389120"/>
+            <a:ext cx="475488" cy="603504"/>
+          </a:xfrm>
+          <a:prstGeom prst="rect">
+            <a:avLst/>
+          </a:prstGeom>
+          <a:noFill/>
+          <a:ln/>
+        </p:spPr>
+        <p:txBody>
+          <a:bodyPr wrap="square" lIns="0" tIns="0" rIns="0" bIns="0" rtlCol="0" anchor="ctr"/>
+          <a:lstStyle/>
+          <a:p>
+            <a:pPr algn="ctr" indent="0" marL="0">
+              <a:buNone/>
+            </a:pPr>
+            <a:r>
+              <a:rPr lang="en-US" sz="2000" b="1" dirty="0">
+                <a:solidFill>
+                  <a:srgbClr val="FFFFFF"/>
+                </a:solidFill>
+              </a:rPr>
+              <a:t>5</a:t>
+            </a:r>
+            <a:endParaRPr lang="en-US" sz="2000" dirty="0"/>
+          </a:p>
+        </p:txBody>
+      </p:sp>
+      <p:sp>
+        <p:nvSpPr>
+          <p:cNvPr id="36" name="Text 34"/>
+          <p:cNvSpPr/>
+          <p:nvPr/>
+        </p:nvSpPr>
+        <p:spPr>
+          <a:xfrm>
+            <a:off x="886968" y="4425696"/>
+            <a:ext cx="2468880" cy="237744"/>
+          </a:xfrm>
+          <a:prstGeom prst="rect">
+            <a:avLst/>
+          </a:prstGeom>
+          <a:noFill/>
+          <a:ln/>
+        </p:spPr>
+        <p:txBody>
+          <a:bodyPr wrap="square" lIns="0" tIns="0" rIns="0" bIns="0" rtlCol="0" anchor="ctr"/>
+          <a:lstStyle/>
+          <a:p>
+            <a:pPr indent="0" marL="0">
+              <a:buNone/>
+            </a:pPr>
+            <a:r>
+              <a:rPr lang="en-US" sz="1250" b="1" dirty="0">
+                <a:solidFill>
+                  <a:srgbClr val="4A7FA8"/>
+                </a:solidFill>
+              </a:rPr>
+              <a:t>Present to peer review</a:t>
+            </a:r>
+            <a:endParaRPr lang="en-US" sz="1250" dirty="0"/>
+          </a:p>
+        </p:txBody>
+      </p:sp>
+      <p:sp>
+        <p:nvSpPr>
+          <p:cNvPr id="37" name="Text 35"/>
+          <p:cNvSpPr/>
+          <p:nvPr/>
+        </p:nvSpPr>
+        <p:spPr>
+          <a:xfrm>
+            <a:off x="3355848" y="4425696"/>
+            <a:ext cx="731520" cy="237744"/>
+          </a:xfrm>
+          <a:prstGeom prst="rect">
+            <a:avLst/>
+          </a:prstGeom>
+          <a:noFill/>
+          <a:ln/>
+        </p:spPr>
+        <p:txBody>
+          <a:bodyPr wrap="square" lIns="0" tIns="0" rIns="0" bIns="0" rtlCol="0" anchor="ctr"/>
+          <a:lstStyle/>
+          <a:p>
+            <a:pPr indent="0" marL="0">
+              <a:buNone/>
+            </a:pPr>
+            <a:r>
+              <a:rPr lang="en-US" sz="1100" i="1" dirty="0">
+                <a:solidFill>
+                  <a:srgbClr val="7A90A8"/>
+                </a:solidFill>
+              </a:rPr>
               <a:t>(7 min)</a:t>
             </a:r>
             <a:endParaRPr lang="en-US" sz="1100" dirty="0"/>
@@ -4565,37 +4872,37 @@
       </p:sp>
       <p:sp>
         <p:nvSpPr>
-          <p:cNvPr id="28" name="Text 26"/>
-          <p:cNvSpPr/>
-          <p:nvPr/>
-        </p:nvSpPr>
-        <p:spPr>
-          <a:xfrm>
-            <a:off x="886968" y="4471416"/>
-            <a:ext cx="7818120" cy="310896"/>
-          </a:xfrm>
-          <a:prstGeom prst="rect">
-            <a:avLst/>
-          </a:prstGeom>
-          <a:noFill/>
-          <a:ln/>
-        </p:spPr>
-        <p:txBody>
-          <a:bodyPr wrap="square" lIns="0" tIns="0" rIns="0" bIns="0" rtlCol="0" anchor="ctr"/>
-          <a:lstStyle/>
-          <a:p>
-            <a:pPr indent="0" marL="0">
-              <a:buNone/>
-            </a:pPr>
-            <a:r>
-              <a:rPr lang="en-US" sz="1100" dirty="0">
+          <p:cNvPr id="38" name="Text 36"/>
+          <p:cNvSpPr/>
+          <p:nvPr/>
+        </p:nvSpPr>
+        <p:spPr>
+          <a:xfrm>
+            <a:off x="886968" y="4700016"/>
+            <a:ext cx="7818120" cy="256032"/>
+          </a:xfrm>
+          <a:prstGeom prst="rect">
+            <a:avLst/>
+          </a:prstGeom>
+          <a:noFill/>
+          <a:ln/>
+        </p:spPr>
+        <p:txBody>
+          <a:bodyPr wrap="square" lIns="0" tIns="0" rIns="0" bIns="0" rtlCol="0" anchor="ctr"/>
+          <a:lstStyle/>
+          <a:p>
+            <a:pPr indent="0" marL="0">
+              <a:buNone/>
+            </a:pPr>
+            <a:r>
+              <a:rPr lang="en-US" sz="1050" dirty="0">
                 <a:solidFill>
                   <a:srgbClr val="7A90A8"/>
                 </a:solidFill>
               </a:rPr>
-              <a:t>For your agent’s primary tool or API: does it have an OpenAPI schema? A type definition? An MCP-compatible interface? If not, sketch what it would look like. What would change in the agent’s reliability?</a:t>
-            </a:r>
-            <a:endParaRPr lang="en-US" sz="1100" dirty="0"/>
+              <a:t>10-minute presentation. Panel plays enterprise architecture review board. Focus questions: security gaps, cost model, and what happens when the agent fails.</a:t>
+            </a:r>
+            <a:endParaRPr lang="en-US" sz="1050" dirty="0"/>
           </a:p>
         </p:txBody>
       </p:sp>
@@ -9154,7 +9461,7 @@
     <p:bg>
       <p:bgPr>
         <a:solidFill>
-          <a:srgbClr val="FFFFFF"/>
+          <a:srgbClr val="1C3557"/>
         </a:solidFill>
       </p:bgPr>
     </p:bg>
@@ -9181,13 +9488,13 @@
         <p:spPr>
           <a:xfrm>
             <a:off x="0" y="0"/>
-            <a:ext cx="9144000" cy="749808"/>
-          </a:xfrm>
-          <a:prstGeom prst="rect">
-            <a:avLst/>
-          </a:prstGeom>
-          <a:solidFill>
-            <a:srgbClr val="1C3557"/>
+            <a:ext cx="164592" cy="5143500"/>
+          </a:xfrm>
+          <a:prstGeom prst="rect">
+            <a:avLst/>
+          </a:prstGeom>
+          <a:solidFill>
+            <a:srgbClr val="3A7DC9"/>
           </a:solidFill>
           <a:ln/>
         </p:spPr>
@@ -9200,8 +9507,8 @@
         </p:nvSpPr>
         <p:spPr>
           <a:xfrm>
-            <a:off x="365760" y="0"/>
-            <a:ext cx="8229600" cy="749808"/>
+            <a:off x="365760" y="201168"/>
+            <a:ext cx="8229600" cy="411480"/>
           </a:xfrm>
           <a:prstGeom prst="rect">
             <a:avLst/>
@@ -9219,48 +9526,48 @@
             <a:r>
               <a:rPr lang="en-US" sz="1300" b="1" spc="300" kern="0" dirty="0">
                 <a:solidFill>
+                  <a:srgbClr val="5B8DB8"/>
+                </a:solidFill>
+              </a:rPr>
+              <a:t>MODULE SCOPE  —  WHAT THIS MODULE COVERS</a:t>
+            </a:r>
+            <a:endParaRPr lang="en-US" sz="1300" dirty="0"/>
+          </a:p>
+        </p:txBody>
+      </p:sp>
+      <p:sp>
+        <p:nvSpPr>
+          <p:cNvPr id="4" name="Text 2"/>
+          <p:cNvSpPr/>
+          <p:nvPr/>
+        </p:nvSpPr>
+        <p:spPr>
+          <a:xfrm>
+            <a:off x="365760" y="658368"/>
+            <a:ext cx="8229600" cy="329184"/>
+          </a:xfrm>
+          <a:prstGeom prst="rect">
+            <a:avLst/>
+          </a:prstGeom>
+          <a:noFill/>
+          <a:ln/>
+        </p:spPr>
+        <p:txBody>
+          <a:bodyPr wrap="square" lIns="0" tIns="0" rIns="0" bIns="0" rtlCol="0" anchor="ctr"/>
+          <a:lstStyle/>
+          <a:p>
+            <a:pPr indent="0" marL="0">
+              <a:buNone/>
+            </a:pPr>
+            <a:r>
+              <a:rPr lang="en-US" sz="1600" i="1" dirty="0">
+                <a:solidFill>
                   <a:srgbClr val="FFFFFF"/>
                 </a:solidFill>
               </a:rPr>
-              <a:t>THE DESIGN REVIEW FRAMEWORK</a:t>
-            </a:r>
-            <a:endParaRPr lang="en-US" sz="1300" dirty="0"/>
-          </a:p>
-        </p:txBody>
-      </p:sp>
-      <p:sp>
-        <p:nvSpPr>
-          <p:cNvPr id="4" name="Text 2"/>
-          <p:cNvSpPr/>
-          <p:nvPr/>
-        </p:nvSpPr>
-        <p:spPr>
-          <a:xfrm>
-            <a:off x="365760" y="822960"/>
-            <a:ext cx="8412480" cy="274320"/>
-          </a:xfrm>
-          <a:prstGeom prst="rect">
-            <a:avLst/>
-          </a:prstGeom>
-          <a:noFill/>
-          <a:ln/>
-        </p:spPr>
-        <p:txBody>
-          <a:bodyPr wrap="square" lIns="0" tIns="0" rIns="0" bIns="0" rtlCol="0" anchor="ctr"/>
-          <a:lstStyle/>
-          <a:p>
-            <a:pPr indent="0" marL="0">
-              <a:buNone/>
-            </a:pPr>
-            <a:r>
-              <a:rPr lang="en-US" sz="1250" i="1" dirty="0">
-                <a:solidFill>
-                  <a:srgbClr val="7A90A8"/>
-                </a:solidFill>
-              </a:rPr>
-              <a:t>Four dimensions to review before every production agent deployment</a:t>
-            </a:r>
-            <a:endParaRPr lang="en-US" sz="1250" dirty="0"/>
+              <a:t>Both parts use the same vocabulary and review discipline. The difference is the blast radius.</a:t>
+            </a:r>
+            <a:endParaRPr lang="en-US" sz="1600" dirty="0"/>
           </a:p>
         </p:txBody>
       </p:sp>
@@ -9272,14 +9579,16 @@
         </p:nvSpPr>
         <p:spPr>
           <a:xfrm>
-            <a:off x="320040" y="1170432"/>
-            <a:ext cx="4160520" cy="1773936"/>
-          </a:xfrm>
-          <a:prstGeom prst="rect">
-            <a:avLst/>
-          </a:prstGeom>
-          <a:solidFill>
-            <a:srgbClr val="F3F6F9"/>
+            <a:off x="320040" y="1115568"/>
+            <a:ext cx="4160520" cy="3401568"/>
+          </a:xfrm>
+          <a:prstGeom prst="rect">
+            <a:avLst/>
+          </a:prstGeom>
+          <a:solidFill>
+            <a:srgbClr val="2E5073">
+              <a:alpha val="85000"/>
+            </a:srgbClr>
           </a:solidFill>
           <a:ln/>
           <a:effectLst>
@@ -9299,564 +9608,290 @@
         </p:nvSpPr>
         <p:spPr>
           <a:xfrm>
-            <a:off x="320040" y="1170432"/>
-            <a:ext cx="4160520" cy="438912"/>
-          </a:xfrm>
-          <a:prstGeom prst="rect">
-            <a:avLst/>
-          </a:prstGeom>
-          <a:solidFill>
-            <a:srgbClr val="1C3557"/>
-          </a:solidFill>
-          <a:ln/>
-        </p:spPr>
-      </p:sp>
-      <p:pic>
-        <p:nvPicPr>
-          <p:cNvPr id="7" name="Image 0" descr="preencoded.png">    </p:cNvPr>
-          <p:cNvPicPr>
-            <a:picLocks noChangeAspect="1"/>
-          </p:cNvPicPr>
-          <p:nvPr/>
-        </p:nvPicPr>
-        <p:blipFill>
-          <a:blip r:embed="rId1"/>
-          <a:stretch>
-            <a:fillRect/>
-          </a:stretch>
-        </p:blipFill>
-        <p:spPr>
-          <a:xfrm>
-            <a:off x="457200" y="1261872"/>
-            <a:ext cx="256032" cy="256032"/>
-          </a:xfrm>
-          <a:prstGeom prst="rect">
-            <a:avLst/>
-          </a:prstGeom>
-        </p:spPr>
-      </p:pic>
-      <p:sp>
-        <p:nvSpPr>
-          <p:cNvPr id="8" name="Text 5"/>
-          <p:cNvSpPr/>
-          <p:nvPr/>
-        </p:nvSpPr>
-        <p:spPr>
-          <a:xfrm>
-            <a:off x="777240" y="1170432"/>
-            <a:ext cx="3611880" cy="438912"/>
-          </a:xfrm>
-          <a:prstGeom prst="rect">
-            <a:avLst/>
-          </a:prstGeom>
-          <a:noFill/>
-          <a:ln/>
-        </p:spPr>
-        <p:txBody>
-          <a:bodyPr wrap="square" lIns="0" tIns="0" rIns="0" bIns="0" rtlCol="0" anchor="ctr"/>
-          <a:lstStyle/>
-          <a:p>
-            <a:pPr indent="0" marL="0">
-              <a:buNone/>
-            </a:pPr>
-            <a:r>
-              <a:rPr lang="en-US" sz="1400" b="1" dirty="0">
+            <a:off x="320040" y="1115568"/>
+            <a:ext cx="4160520" cy="475488"/>
+          </a:xfrm>
+          <a:prstGeom prst="rect">
+            <a:avLst/>
+          </a:prstGeom>
+          <a:solidFill>
+            <a:srgbClr val="4A7FA8">
+              <a:alpha val="90000"/>
+            </a:srgbClr>
+          </a:solidFill>
+          <a:ln/>
+        </p:spPr>
+      </p:sp>
+      <p:sp>
+        <p:nvSpPr>
+          <p:cNvPr id="7" name="Text 5"/>
+          <p:cNvSpPr/>
+          <p:nvPr/>
+        </p:nvSpPr>
+        <p:spPr>
+          <a:xfrm>
+            <a:off x="320040" y="1115568"/>
+            <a:ext cx="4160520" cy="475488"/>
+          </a:xfrm>
+          <a:prstGeom prst="rect">
+            <a:avLst/>
+          </a:prstGeom>
+          <a:noFill/>
+          <a:ln/>
+        </p:spPr>
+        <p:txBody>
+          <a:bodyPr wrap="square" lIns="0" tIns="0" rIns="0" bIns="0" rtlCol="0" anchor="ctr"/>
+          <a:lstStyle/>
+          <a:p>
+            <a:pPr algn="ctr" indent="0" marL="0">
+              <a:buNone/>
+            </a:pPr>
+            <a:r>
+              <a:rPr lang="en-US" sz="1250" b="1" dirty="0">
                 <a:solidFill>
                   <a:srgbClr val="FFFFFF"/>
                 </a:solidFill>
               </a:rPr>
-              <a:t>Architecture</a:t>
-            </a:r>
-            <a:endParaRPr lang="en-US" sz="1400" dirty="0"/>
-          </a:p>
-        </p:txBody>
-      </p:sp>
-      <p:sp>
-        <p:nvSpPr>
-          <p:cNvPr id="9" name="Shape 6"/>
-          <p:cNvSpPr/>
-          <p:nvPr/>
-        </p:nvSpPr>
-        <p:spPr>
-          <a:xfrm>
-            <a:off x="429768" y="1682496"/>
-            <a:ext cx="219456" cy="201168"/>
-          </a:xfrm>
-          <a:prstGeom prst="rect">
-            <a:avLst/>
-          </a:prstGeom>
-          <a:solidFill>
-            <a:srgbClr val="1C3557">
-              <a:alpha val="20000"/>
+              <a:t>PART 1 — Coding Agent Workflows</a:t>
+            </a:r>
+            <a:endParaRPr lang="en-US" sz="1250" dirty="0"/>
+          </a:p>
+        </p:txBody>
+      </p:sp>
+      <p:sp>
+        <p:nvSpPr>
+          <p:cNvPr id="8" name="Text 6"/>
+          <p:cNvSpPr/>
+          <p:nvPr/>
+        </p:nvSpPr>
+        <p:spPr>
+          <a:xfrm>
+            <a:off x="411480" y="1664208"/>
+            <a:ext cx="3977640" cy="274320"/>
+          </a:xfrm>
+          <a:prstGeom prst="rect">
+            <a:avLst/>
+          </a:prstGeom>
+          <a:noFill/>
+          <a:ln/>
+        </p:spPr>
+        <p:txBody>
+          <a:bodyPr wrap="square" lIns="0" tIns="0" rIns="0" bIns="0" rtlCol="0" anchor="ctr"/>
+          <a:lstStyle/>
+          <a:p>
+            <a:pPr indent="0" marL="0">
+              <a:buNone/>
+            </a:pPr>
+            <a:r>
+              <a:rPr lang="en-US" sz="1050" i="1" dirty="0">
+                <a:solidFill>
+                  <a:srgbClr val="5B8DB8"/>
+                </a:solidFill>
+              </a:rPr>
+              <a:t>Reviewing your use of coding agents (Claude Code, Copilot) in the SDLC</a:t>
+            </a:r>
+            <a:endParaRPr lang="en-US" sz="1050" dirty="0"/>
+          </a:p>
+        </p:txBody>
+      </p:sp>
+      <p:sp>
+        <p:nvSpPr>
+          <p:cNvPr id="9" name="Text 7"/>
+          <p:cNvSpPr/>
+          <p:nvPr/>
+        </p:nvSpPr>
+        <p:spPr>
+          <a:xfrm>
+            <a:off x="475488" y="2011680"/>
+            <a:ext cx="3886200" cy="384048"/>
+          </a:xfrm>
+          <a:prstGeom prst="rect">
+            <a:avLst/>
+          </a:prstGeom>
+          <a:noFill/>
+          <a:ln/>
+        </p:spPr>
+        <p:txBody>
+          <a:bodyPr wrap="square" lIns="0" tIns="0" rIns="0" bIns="0" rtlCol="0" anchor="ctr"/>
+          <a:lstStyle/>
+          <a:p>
+            <a:pPr indent="0" marL="0">
+              <a:buNone/>
+            </a:pPr>
+            <a:r>
+              <a:rPr lang="en-US" sz="1100" dirty="0">
+                <a:solidFill>
+                  <a:srgbClr val="D4E4F0"/>
+                </a:solidFill>
+              </a:rPr>
+              <a:t>• Agent-first design principles (P1–P6) govern how your team works today</a:t>
+            </a:r>
+            <a:endParaRPr lang="en-US" sz="1100" dirty="0"/>
+          </a:p>
+        </p:txBody>
+      </p:sp>
+      <p:sp>
+        <p:nvSpPr>
+          <p:cNvPr id="10" name="Text 8"/>
+          <p:cNvSpPr/>
+          <p:nvPr/>
+        </p:nvSpPr>
+        <p:spPr>
+          <a:xfrm>
+            <a:off x="475488" y="2450592"/>
+            <a:ext cx="3886200" cy="384048"/>
+          </a:xfrm>
+          <a:prstGeom prst="rect">
+            <a:avLst/>
+          </a:prstGeom>
+          <a:noFill/>
+          <a:ln/>
+        </p:spPr>
+        <p:txBody>
+          <a:bodyPr wrap="square" lIns="0" tIns="0" rIns="0" bIns="0" rtlCol="0" anchor="ctr"/>
+          <a:lstStyle/>
+          <a:p>
+            <a:pPr indent="0" marL="0">
+              <a:buNone/>
+            </a:pPr>
+            <a:r>
+              <a:rPr lang="en-US" sz="1100" dirty="0">
+                <a:solidFill>
+                  <a:srgbClr val="D4E4F0"/>
+                </a:solidFill>
+              </a:rPr>
+              <a:t>• AX design thinking shapes your CLAUDE.md, folder structure, and tool schemas</a:t>
+            </a:r>
+            <a:endParaRPr lang="en-US" sz="1100" dirty="0"/>
+          </a:p>
+        </p:txBody>
+      </p:sp>
+      <p:sp>
+        <p:nvSpPr>
+          <p:cNvPr id="11" name="Text 9"/>
+          <p:cNvSpPr/>
+          <p:nvPr/>
+        </p:nvSpPr>
+        <p:spPr>
+          <a:xfrm>
+            <a:off x="475488" y="2889504"/>
+            <a:ext cx="3886200" cy="384048"/>
+          </a:xfrm>
+          <a:prstGeom prst="rect">
+            <a:avLst/>
+          </a:prstGeom>
+          <a:noFill/>
+          <a:ln/>
+        </p:spPr>
+        <p:txBody>
+          <a:bodyPr wrap="square" lIns="0" tIns="0" rIns="0" bIns="0" rtlCol="0" anchor="ctr"/>
+          <a:lstStyle/>
+          <a:p>
+            <a:pPr indent="0" marL="0">
+              <a:buNone/>
+            </a:pPr>
+            <a:r>
+              <a:rPr lang="en-US" sz="1100" dirty="0">
+                <a:solidFill>
+                  <a:srgbClr val="D4E4F0"/>
+                </a:solidFill>
+              </a:rPr>
+              <a:t>• ADR practices capture decisions agents and engineers both need</a:t>
+            </a:r>
+            <a:endParaRPr lang="en-US" sz="1100" dirty="0"/>
+          </a:p>
+        </p:txBody>
+      </p:sp>
+      <p:sp>
+        <p:nvSpPr>
+          <p:cNvPr id="12" name="Text 10"/>
+          <p:cNvSpPr/>
+          <p:nvPr/>
+        </p:nvSpPr>
+        <p:spPr>
+          <a:xfrm>
+            <a:off x="475488" y="3328416"/>
+            <a:ext cx="3886200" cy="384048"/>
+          </a:xfrm>
+          <a:prstGeom prst="rect">
+            <a:avLst/>
+          </a:prstGeom>
+          <a:noFill/>
+          <a:ln/>
+        </p:spPr>
+        <p:txBody>
+          <a:bodyPr wrap="square" lIns="0" tIns="0" rIns="0" bIns="0" rtlCol="0" anchor="ctr"/>
+          <a:lstStyle/>
+          <a:p>
+            <a:pPr indent="0" marL="0">
+              <a:buNone/>
+            </a:pPr>
+            <a:r>
+              <a:rPr lang="en-US" sz="1100" dirty="0">
+                <a:solidFill>
+                  <a:srgbClr val="D4E4F0"/>
+                </a:solidFill>
+              </a:rPr>
+              <a:t>• Lightweight checklist subset: items 01, 04, 05, 06, 07, 10</a:t>
+            </a:r>
+            <a:endParaRPr lang="en-US" sz="1100" dirty="0"/>
+          </a:p>
+        </p:txBody>
+      </p:sp>
+      <p:sp>
+        <p:nvSpPr>
+          <p:cNvPr id="13" name="Text 11"/>
+          <p:cNvSpPr/>
+          <p:nvPr/>
+        </p:nvSpPr>
+        <p:spPr>
+          <a:xfrm>
+            <a:off x="475488" y="3767328"/>
+            <a:ext cx="3886200" cy="384048"/>
+          </a:xfrm>
+          <a:prstGeom prst="rect">
+            <a:avLst/>
+          </a:prstGeom>
+          <a:noFill/>
+          <a:ln/>
+        </p:spPr>
+        <p:txBody>
+          <a:bodyPr wrap="square" lIns="0" tIns="0" rIns="0" bIns="0" rtlCol="0" anchor="ctr"/>
+          <a:lstStyle/>
+          <a:p>
+            <a:pPr indent="0" marL="0">
+              <a:buNone/>
+            </a:pPr>
+            <a:r>
+              <a:rPr lang="en-US" sz="1100" dirty="0">
+                <a:solidFill>
+                  <a:srgbClr val="D4E4F0"/>
+                </a:solidFill>
+              </a:rPr>
+              <a:t>• Applies NOW — to your codebase, your workflows, your team</a:t>
+            </a:r>
+            <a:endParaRPr lang="en-US" sz="1100" dirty="0"/>
+          </a:p>
+        </p:txBody>
+      </p:sp>
+      <p:sp>
+        <p:nvSpPr>
+          <p:cNvPr id="14" name="Shape 12"/>
+          <p:cNvSpPr/>
+          <p:nvPr/>
+        </p:nvSpPr>
+        <p:spPr>
+          <a:xfrm>
+            <a:off x="4663440" y="1115568"/>
+            <a:ext cx="4160520" cy="3401568"/>
+          </a:xfrm>
+          <a:prstGeom prst="rect">
+            <a:avLst/>
+          </a:prstGeom>
+          <a:solidFill>
+            <a:srgbClr val="2E5073">
+              <a:alpha val="85000"/>
             </a:srgbClr>
-          </a:solidFill>
-          <a:ln/>
-        </p:spPr>
-      </p:sp>
-      <p:sp>
-        <p:nvSpPr>
-          <p:cNvPr id="10" name="Text 7"/>
-          <p:cNvSpPr/>
-          <p:nvPr/>
-        </p:nvSpPr>
-        <p:spPr>
-          <a:xfrm>
-            <a:off x="429768" y="1682496"/>
-            <a:ext cx="219456" cy="201168"/>
-          </a:xfrm>
-          <a:prstGeom prst="rect">
-            <a:avLst/>
-          </a:prstGeom>
-          <a:noFill/>
-          <a:ln/>
-        </p:spPr>
-        <p:txBody>
-          <a:bodyPr wrap="square" lIns="0" tIns="0" rIns="0" bIns="0" rtlCol="0" anchor="ctr"/>
-          <a:lstStyle/>
-          <a:p>
-            <a:pPr algn="ctr" indent="0" marL="0">
-              <a:buNone/>
-            </a:pPr>
-            <a:r>
-              <a:rPr lang="en-US" sz="1000" dirty="0">
-                <a:solidFill>
-                  <a:srgbClr val="1C3557"/>
-                </a:solidFill>
-              </a:rPr>
-              <a:t>□</a:t>
-            </a:r>
-            <a:endParaRPr lang="en-US" sz="1000" dirty="0"/>
-          </a:p>
-        </p:txBody>
-      </p:sp>
-      <p:sp>
-        <p:nvSpPr>
-          <p:cNvPr id="11" name="Text 8"/>
-          <p:cNvSpPr/>
-          <p:nvPr/>
-        </p:nvSpPr>
-        <p:spPr>
-          <a:xfrm>
-            <a:off x="722376" y="1682496"/>
-            <a:ext cx="3648456" cy="219456"/>
-          </a:xfrm>
-          <a:prstGeom prst="rect">
-            <a:avLst/>
-          </a:prstGeom>
-          <a:noFill/>
-          <a:ln/>
-        </p:spPr>
-        <p:txBody>
-          <a:bodyPr wrap="square" lIns="0" tIns="0" rIns="0" bIns="0" rtlCol="0" anchor="ctr"/>
-          <a:lstStyle/>
-          <a:p>
-            <a:pPr indent="0" marL="0">
-              <a:buNone/>
-            </a:pPr>
-            <a:r>
-              <a:rPr lang="en-US" sz="1050" dirty="0">
-                <a:solidFill>
-                  <a:srgbClr val="1E2D3D"/>
-                </a:solidFill>
-              </a:rPr>
-              <a:t>Is agent scope clearly bounded?</a:t>
-            </a:r>
-            <a:endParaRPr lang="en-US" sz="1050" dirty="0"/>
-          </a:p>
-        </p:txBody>
-      </p:sp>
-      <p:sp>
-        <p:nvSpPr>
-          <p:cNvPr id="12" name="Shape 9"/>
-          <p:cNvSpPr/>
-          <p:nvPr/>
-        </p:nvSpPr>
-        <p:spPr>
-          <a:xfrm>
-            <a:off x="429768" y="1938528"/>
-            <a:ext cx="219456" cy="201168"/>
-          </a:xfrm>
-          <a:prstGeom prst="rect">
-            <a:avLst/>
-          </a:prstGeom>
-          <a:solidFill>
-            <a:srgbClr val="1C3557">
-              <a:alpha val="20000"/>
-            </a:srgbClr>
-          </a:solidFill>
-          <a:ln/>
-        </p:spPr>
-      </p:sp>
-      <p:sp>
-        <p:nvSpPr>
-          <p:cNvPr id="13" name="Text 10"/>
-          <p:cNvSpPr/>
-          <p:nvPr/>
-        </p:nvSpPr>
-        <p:spPr>
-          <a:xfrm>
-            <a:off x="429768" y="1938528"/>
-            <a:ext cx="219456" cy="201168"/>
-          </a:xfrm>
-          <a:prstGeom prst="rect">
-            <a:avLst/>
-          </a:prstGeom>
-          <a:noFill/>
-          <a:ln/>
-        </p:spPr>
-        <p:txBody>
-          <a:bodyPr wrap="square" lIns="0" tIns="0" rIns="0" bIns="0" rtlCol="0" anchor="ctr"/>
-          <a:lstStyle/>
-          <a:p>
-            <a:pPr algn="ctr" indent="0" marL="0">
-              <a:buNone/>
-            </a:pPr>
-            <a:r>
-              <a:rPr lang="en-US" sz="1000" dirty="0">
-                <a:solidFill>
-                  <a:srgbClr val="1C3557"/>
-                </a:solidFill>
-              </a:rPr>
-              <a:t>□</a:t>
-            </a:r>
-            <a:endParaRPr lang="en-US" sz="1000" dirty="0"/>
-          </a:p>
-        </p:txBody>
-      </p:sp>
-      <p:sp>
-        <p:nvSpPr>
-          <p:cNvPr id="14" name="Text 11"/>
-          <p:cNvSpPr/>
-          <p:nvPr/>
-        </p:nvSpPr>
-        <p:spPr>
-          <a:xfrm>
-            <a:off x="722376" y="1938528"/>
-            <a:ext cx="3648456" cy="219456"/>
-          </a:xfrm>
-          <a:prstGeom prst="rect">
-            <a:avLst/>
-          </a:prstGeom>
-          <a:noFill/>
-          <a:ln/>
-        </p:spPr>
-        <p:txBody>
-          <a:bodyPr wrap="square" lIns="0" tIns="0" rIns="0" bIns="0" rtlCol="0" anchor="ctr"/>
-          <a:lstStyle/>
-          <a:p>
-            <a:pPr indent="0" marL="0">
-              <a:buNone/>
-            </a:pPr>
-            <a:r>
-              <a:rPr lang="en-US" sz="1050" dirty="0">
-                <a:solidFill>
-                  <a:srgbClr val="1E2D3D"/>
-                </a:solidFill>
-              </a:rPr>
-              <a:t>Is infrastructure outside the agent boundary?</a:t>
-            </a:r>
-            <a:endParaRPr lang="en-US" sz="1050" dirty="0"/>
-          </a:p>
-        </p:txBody>
-      </p:sp>
-      <p:sp>
-        <p:nvSpPr>
-          <p:cNvPr id="15" name="Shape 12"/>
-          <p:cNvSpPr/>
-          <p:nvPr/>
-        </p:nvSpPr>
-        <p:spPr>
-          <a:xfrm>
-            <a:off x="429768" y="2194560"/>
-            <a:ext cx="219456" cy="201168"/>
-          </a:xfrm>
-          <a:prstGeom prst="rect">
-            <a:avLst/>
-          </a:prstGeom>
-          <a:solidFill>
-            <a:srgbClr val="1C3557">
-              <a:alpha val="20000"/>
-            </a:srgbClr>
-          </a:solidFill>
-          <a:ln/>
-        </p:spPr>
-      </p:sp>
-      <p:sp>
-        <p:nvSpPr>
-          <p:cNvPr id="16" name="Text 13"/>
-          <p:cNvSpPr/>
-          <p:nvPr/>
-        </p:nvSpPr>
-        <p:spPr>
-          <a:xfrm>
-            <a:off x="429768" y="2194560"/>
-            <a:ext cx="219456" cy="201168"/>
-          </a:xfrm>
-          <a:prstGeom prst="rect">
-            <a:avLst/>
-          </a:prstGeom>
-          <a:noFill/>
-          <a:ln/>
-        </p:spPr>
-        <p:txBody>
-          <a:bodyPr wrap="square" lIns="0" tIns="0" rIns="0" bIns="0" rtlCol="0" anchor="ctr"/>
-          <a:lstStyle/>
-          <a:p>
-            <a:pPr algn="ctr" indent="0" marL="0">
-              <a:buNone/>
-            </a:pPr>
-            <a:r>
-              <a:rPr lang="en-US" sz="1000" dirty="0">
-                <a:solidFill>
-                  <a:srgbClr val="1C3557"/>
-                </a:solidFill>
-              </a:rPr>
-              <a:t>□</a:t>
-            </a:r>
-            <a:endParaRPr lang="en-US" sz="1000" dirty="0"/>
-          </a:p>
-        </p:txBody>
-      </p:sp>
-      <p:sp>
-        <p:nvSpPr>
-          <p:cNvPr id="17" name="Text 14"/>
-          <p:cNvSpPr/>
-          <p:nvPr/>
-        </p:nvSpPr>
-        <p:spPr>
-          <a:xfrm>
-            <a:off x="722376" y="2194560"/>
-            <a:ext cx="3648456" cy="219456"/>
-          </a:xfrm>
-          <a:prstGeom prst="rect">
-            <a:avLst/>
-          </a:prstGeom>
-          <a:noFill/>
-          <a:ln/>
-        </p:spPr>
-        <p:txBody>
-          <a:bodyPr wrap="square" lIns="0" tIns="0" rIns="0" bIns="0" rtlCol="0" anchor="ctr"/>
-          <a:lstStyle/>
-          <a:p>
-            <a:pPr indent="0" marL="0">
-              <a:buNone/>
-            </a:pPr>
-            <a:r>
-              <a:rPr lang="en-US" sz="1050" dirty="0">
-                <a:solidFill>
-                  <a:srgbClr val="1E2D3D"/>
-                </a:solidFill>
-              </a:rPr>
-              <a:t>Are tools self-contained and non-overlapping?</a:t>
-            </a:r>
-            <a:endParaRPr lang="en-US" sz="1050" dirty="0"/>
-          </a:p>
-        </p:txBody>
-      </p:sp>
-      <p:sp>
-        <p:nvSpPr>
-          <p:cNvPr id="18" name="Shape 15"/>
-          <p:cNvSpPr/>
-          <p:nvPr/>
-        </p:nvSpPr>
-        <p:spPr>
-          <a:xfrm>
-            <a:off x="429768" y="2450592"/>
-            <a:ext cx="219456" cy="201168"/>
-          </a:xfrm>
-          <a:prstGeom prst="rect">
-            <a:avLst/>
-          </a:prstGeom>
-          <a:solidFill>
-            <a:srgbClr val="1C3557">
-              <a:alpha val="20000"/>
-            </a:srgbClr>
-          </a:solidFill>
-          <a:ln/>
-        </p:spPr>
-      </p:sp>
-      <p:sp>
-        <p:nvSpPr>
-          <p:cNvPr id="19" name="Text 16"/>
-          <p:cNvSpPr/>
-          <p:nvPr/>
-        </p:nvSpPr>
-        <p:spPr>
-          <a:xfrm>
-            <a:off x="429768" y="2450592"/>
-            <a:ext cx="219456" cy="201168"/>
-          </a:xfrm>
-          <a:prstGeom prst="rect">
-            <a:avLst/>
-          </a:prstGeom>
-          <a:noFill/>
-          <a:ln/>
-        </p:spPr>
-        <p:txBody>
-          <a:bodyPr wrap="square" lIns="0" tIns="0" rIns="0" bIns="0" rtlCol="0" anchor="ctr"/>
-          <a:lstStyle/>
-          <a:p>
-            <a:pPr algn="ctr" indent="0" marL="0">
-              <a:buNone/>
-            </a:pPr>
-            <a:r>
-              <a:rPr lang="en-US" sz="1000" dirty="0">
-                <a:solidFill>
-                  <a:srgbClr val="1C3557"/>
-                </a:solidFill>
-              </a:rPr>
-              <a:t>□</a:t>
-            </a:r>
-            <a:endParaRPr lang="en-US" sz="1000" dirty="0"/>
-          </a:p>
-        </p:txBody>
-      </p:sp>
-      <p:sp>
-        <p:nvSpPr>
-          <p:cNvPr id="20" name="Text 17"/>
-          <p:cNvSpPr/>
-          <p:nvPr/>
-        </p:nvSpPr>
-        <p:spPr>
-          <a:xfrm>
-            <a:off x="722376" y="2450592"/>
-            <a:ext cx="3648456" cy="219456"/>
-          </a:xfrm>
-          <a:prstGeom prst="rect">
-            <a:avLst/>
-          </a:prstGeom>
-          <a:noFill/>
-          <a:ln/>
-        </p:spPr>
-        <p:txBody>
-          <a:bodyPr wrap="square" lIns="0" tIns="0" rIns="0" bIns="0" rtlCol="0" anchor="ctr"/>
-          <a:lstStyle/>
-          <a:p>
-            <a:pPr indent="0" marL="0">
-              <a:buNone/>
-            </a:pPr>
-            <a:r>
-              <a:rPr lang="en-US" sz="1050" dirty="0">
-                <a:solidFill>
-                  <a:srgbClr val="1E2D3D"/>
-                </a:solidFill>
-              </a:rPr>
-              <a:t>Is folder/file structure communicating intent?</a:t>
-            </a:r>
-            <a:endParaRPr lang="en-US" sz="1050" dirty="0"/>
-          </a:p>
-        </p:txBody>
-      </p:sp>
-      <p:sp>
-        <p:nvSpPr>
-          <p:cNvPr id="21" name="Shape 18"/>
-          <p:cNvSpPr/>
-          <p:nvPr/>
-        </p:nvSpPr>
-        <p:spPr>
-          <a:xfrm>
-            <a:off x="429768" y="2706624"/>
-            <a:ext cx="219456" cy="201168"/>
-          </a:xfrm>
-          <a:prstGeom prst="rect">
-            <a:avLst/>
-          </a:prstGeom>
-          <a:solidFill>
-            <a:srgbClr val="1C3557">
-              <a:alpha val="20000"/>
-            </a:srgbClr>
-          </a:solidFill>
-          <a:ln/>
-        </p:spPr>
-      </p:sp>
-      <p:sp>
-        <p:nvSpPr>
-          <p:cNvPr id="22" name="Text 19"/>
-          <p:cNvSpPr/>
-          <p:nvPr/>
-        </p:nvSpPr>
-        <p:spPr>
-          <a:xfrm>
-            <a:off x="429768" y="2706624"/>
-            <a:ext cx="219456" cy="201168"/>
-          </a:xfrm>
-          <a:prstGeom prst="rect">
-            <a:avLst/>
-          </a:prstGeom>
-          <a:noFill/>
-          <a:ln/>
-        </p:spPr>
-        <p:txBody>
-          <a:bodyPr wrap="square" lIns="0" tIns="0" rIns="0" bIns="0" rtlCol="0" anchor="ctr"/>
-          <a:lstStyle/>
-          <a:p>
-            <a:pPr algn="ctr" indent="0" marL="0">
-              <a:buNone/>
-            </a:pPr>
-            <a:r>
-              <a:rPr lang="en-US" sz="1000" dirty="0">
-                <a:solidFill>
-                  <a:srgbClr val="1C3557"/>
-                </a:solidFill>
-              </a:rPr>
-              <a:t>□</a:t>
-            </a:r>
-            <a:endParaRPr lang="en-US" sz="1000" dirty="0"/>
-          </a:p>
-        </p:txBody>
-      </p:sp>
-      <p:sp>
-        <p:nvSpPr>
-          <p:cNvPr id="23" name="Text 20"/>
-          <p:cNvSpPr/>
-          <p:nvPr/>
-        </p:nvSpPr>
-        <p:spPr>
-          <a:xfrm>
-            <a:off x="722376" y="2706624"/>
-            <a:ext cx="3648456" cy="219456"/>
-          </a:xfrm>
-          <a:prstGeom prst="rect">
-            <a:avLst/>
-          </a:prstGeom>
-          <a:noFill/>
-          <a:ln/>
-        </p:spPr>
-        <p:txBody>
-          <a:bodyPr wrap="square" lIns="0" tIns="0" rIns="0" bIns="0" rtlCol="0" anchor="ctr"/>
-          <a:lstStyle/>
-          <a:p>
-            <a:pPr indent="0" marL="0">
-              <a:buNone/>
-            </a:pPr>
-            <a:r>
-              <a:rPr lang="en-US" sz="1050" dirty="0">
-                <a:solidFill>
-                  <a:srgbClr val="1E2D3D"/>
-                </a:solidFill>
-              </a:rPr>
-              <a:t>Are subagent boundaries defined?</a:t>
-            </a:r>
-            <a:endParaRPr lang="en-US" sz="1050" dirty="0"/>
-          </a:p>
-        </p:txBody>
-      </p:sp>
-      <p:sp>
-        <p:nvSpPr>
-          <p:cNvPr id="24" name="Shape 21"/>
-          <p:cNvSpPr/>
-          <p:nvPr/>
-        </p:nvSpPr>
-        <p:spPr>
-          <a:xfrm>
-            <a:off x="4663440" y="1170432"/>
-            <a:ext cx="4160520" cy="1773936"/>
-          </a:xfrm>
-          <a:prstGeom prst="rect">
-            <a:avLst/>
-          </a:prstGeom>
-          <a:solidFill>
-            <a:srgbClr val="F3F6F9"/>
           </a:solidFill>
           <a:ln/>
           <a:effectLst>
@@ -9870,101 +9905,295 @@
       </p:sp>
       <p:sp>
         <p:nvSpPr>
-          <p:cNvPr id="25" name="Shape 22"/>
-          <p:cNvSpPr/>
-          <p:nvPr/>
-        </p:nvSpPr>
-        <p:spPr>
-          <a:xfrm>
-            <a:off x="4663440" y="1170432"/>
-            <a:ext cx="4160520" cy="438912"/>
-          </a:xfrm>
-          <a:prstGeom prst="rect">
-            <a:avLst/>
-          </a:prstGeom>
-          <a:solidFill>
-            <a:srgbClr val="4A7FA8"/>
-          </a:solidFill>
-          <a:ln/>
-        </p:spPr>
-      </p:sp>
-      <p:pic>
-        <p:nvPicPr>
-          <p:cNvPr id="26" name="Image 1" descr="preencoded.png">    </p:cNvPr>
-          <p:cNvPicPr>
-            <a:picLocks noChangeAspect="1"/>
-          </p:cNvPicPr>
-          <p:nvPr/>
-        </p:nvPicPr>
-        <p:blipFill>
-          <a:blip r:embed="rId2"/>
-          <a:stretch>
-            <a:fillRect/>
-          </a:stretch>
-        </p:blipFill>
-        <p:spPr>
-          <a:xfrm>
-            <a:off x="4800600" y="1261872"/>
-            <a:ext cx="256032" cy="256032"/>
-          </a:xfrm>
-          <a:prstGeom prst="rect">
-            <a:avLst/>
-          </a:prstGeom>
-        </p:spPr>
-      </p:pic>
-      <p:sp>
-        <p:nvSpPr>
-          <p:cNvPr id="27" name="Text 23"/>
-          <p:cNvSpPr/>
-          <p:nvPr/>
-        </p:nvSpPr>
-        <p:spPr>
-          <a:xfrm>
-            <a:off x="5120640" y="1170432"/>
-            <a:ext cx="3611880" cy="438912"/>
-          </a:xfrm>
-          <a:prstGeom prst="rect">
-            <a:avLst/>
-          </a:prstGeom>
-          <a:noFill/>
-          <a:ln/>
-        </p:spPr>
-        <p:txBody>
-          <a:bodyPr wrap="square" lIns="0" tIns="0" rIns="0" bIns="0" rtlCol="0" anchor="ctr"/>
-          <a:lstStyle/>
-          <a:p>
-            <a:pPr indent="0" marL="0">
-              <a:buNone/>
-            </a:pPr>
-            <a:r>
-              <a:rPr lang="en-US" sz="1400" b="1" dirty="0">
+          <p:cNvPr id="15" name="Shape 13"/>
+          <p:cNvSpPr/>
+          <p:nvPr/>
+        </p:nvSpPr>
+        <p:spPr>
+          <a:xfrm>
+            <a:off x="4663440" y="1115568"/>
+            <a:ext cx="4160520" cy="475488"/>
+          </a:xfrm>
+          <a:prstGeom prst="rect">
+            <a:avLst/>
+          </a:prstGeom>
+          <a:solidFill>
+            <a:srgbClr val="3A7DC9">
+              <a:alpha val="90000"/>
+            </a:srgbClr>
+          </a:solidFill>
+          <a:ln/>
+        </p:spPr>
+      </p:sp>
+      <p:sp>
+        <p:nvSpPr>
+          <p:cNvPr id="16" name="Text 14"/>
+          <p:cNvSpPr/>
+          <p:nvPr/>
+        </p:nvSpPr>
+        <p:spPr>
+          <a:xfrm>
+            <a:off x="4663440" y="1115568"/>
+            <a:ext cx="4160520" cy="475488"/>
+          </a:xfrm>
+          <a:prstGeom prst="rect">
+            <a:avLst/>
+          </a:prstGeom>
+          <a:noFill/>
+          <a:ln/>
+        </p:spPr>
+        <p:txBody>
+          <a:bodyPr wrap="square" lIns="0" tIns="0" rIns="0" bIns="0" rtlCol="0" anchor="ctr"/>
+          <a:lstStyle/>
+          <a:p>
+            <a:pPr algn="ctr" indent="0" marL="0">
+              <a:buNone/>
+            </a:pPr>
+            <a:r>
+              <a:rPr lang="en-US" sz="1250" b="1" dirty="0">
                 <a:solidFill>
                   <a:srgbClr val="FFFFFF"/>
                 </a:solidFill>
               </a:rPr>
-              <a:t>Agent Experience</a:t>
-            </a:r>
-            <a:endParaRPr lang="en-US" sz="1400" dirty="0"/>
-          </a:p>
-        </p:txBody>
-      </p:sp>
-      <p:sp>
-        <p:nvSpPr>
-          <p:cNvPr id="28" name="Shape 24"/>
-          <p:cNvSpPr/>
-          <p:nvPr/>
-        </p:nvSpPr>
-        <p:spPr>
-          <a:xfrm>
-            <a:off x="4773168" y="1682496"/>
-            <a:ext cx="219456" cy="201168"/>
-          </a:xfrm>
-          <a:prstGeom prst="rect">
-            <a:avLst/>
-          </a:prstGeom>
-          <a:solidFill>
-            <a:srgbClr val="4A7FA8">
-              <a:alpha val="20000"/>
+              <a:t>PART 2 — Production Agent Systems</a:t>
+            </a:r>
+            <a:endParaRPr lang="en-US" sz="1250" dirty="0"/>
+          </a:p>
+        </p:txBody>
+      </p:sp>
+      <p:sp>
+        <p:nvSpPr>
+          <p:cNvPr id="17" name="Text 15"/>
+          <p:cNvSpPr/>
+          <p:nvPr/>
+        </p:nvSpPr>
+        <p:spPr>
+          <a:xfrm>
+            <a:off x="4754880" y="1664208"/>
+            <a:ext cx="3977640" cy="274320"/>
+          </a:xfrm>
+          <a:prstGeom prst="rect">
+            <a:avLst/>
+          </a:prstGeom>
+          <a:noFill/>
+          <a:ln/>
+        </p:spPr>
+        <p:txBody>
+          <a:bodyPr wrap="square" lIns="0" tIns="0" rIns="0" bIns="0" rtlCol="0" anchor="ctr"/>
+          <a:lstStyle/>
+          <a:p>
+            <a:pPr indent="0" marL="0">
+              <a:buNone/>
+            </a:pPr>
+            <a:r>
+              <a:rPr lang="en-US" sz="1050" i="1" dirty="0">
+                <a:solidFill>
+                  <a:srgbClr val="5B8DB8"/>
+                </a:solidFill>
+              </a:rPr>
+              <a:t>Designing agent systems your team ships as products (AWS Bedrock, Agent Core…)</a:t>
+            </a:r>
+            <a:endParaRPr lang="en-US" sz="1050" dirty="0"/>
+          </a:p>
+        </p:txBody>
+      </p:sp>
+      <p:sp>
+        <p:nvSpPr>
+          <p:cNvPr id="18" name="Text 16"/>
+          <p:cNvSpPr/>
+          <p:nvPr/>
+        </p:nvSpPr>
+        <p:spPr>
+          <a:xfrm>
+            <a:off x="4754880" y="2011680"/>
+            <a:ext cx="3977640" cy="384048"/>
+          </a:xfrm>
+          <a:prstGeom prst="rect">
+            <a:avLst/>
+          </a:prstGeom>
+          <a:noFill/>
+          <a:ln/>
+        </p:spPr>
+        <p:txBody>
+          <a:bodyPr wrap="square" lIns="0" tIns="0" rIns="0" bIns="0" rtlCol="0" anchor="ctr"/>
+          <a:lstStyle/>
+          <a:p>
+            <a:pPr indent="0" marL="0">
+              <a:buNone/>
+            </a:pPr>
+            <a:r>
+              <a:rPr lang="en-US" sz="1100" dirty="0">
+                <a:solidFill>
+                  <a:srgbClr val="D4E4F0"/>
+                </a:solidFill>
+              </a:rPr>
+              <a:t>• Full 12-point checklist required before production deployment</a:t>
+            </a:r>
+            <a:endParaRPr lang="en-US" sz="1100" dirty="0"/>
+          </a:p>
+        </p:txBody>
+      </p:sp>
+      <p:sp>
+        <p:nvSpPr>
+          <p:cNvPr id="19" name="Text 17"/>
+          <p:cNvSpPr/>
+          <p:nvPr/>
+        </p:nvSpPr>
+        <p:spPr>
+          <a:xfrm>
+            <a:off x="4754880" y="2450592"/>
+            <a:ext cx="3977640" cy="384048"/>
+          </a:xfrm>
+          <a:prstGeom prst="rect">
+            <a:avLst/>
+          </a:prstGeom>
+          <a:noFill/>
+          <a:ln/>
+        </p:spPr>
+        <p:txBody>
+          <a:bodyPr wrap="square" lIns="0" tIns="0" rIns="0" bIns="0" rtlCol="0" anchor="ctr"/>
+          <a:lstStyle/>
+          <a:p>
+            <a:pPr indent="0" marL="0">
+              <a:buNone/>
+            </a:pPr>
+            <a:r>
+              <a:rPr lang="en-US" sz="1100" dirty="0">
+                <a:solidFill>
+                  <a:srgbClr val="D4E4F0"/>
+                </a:solidFill>
+              </a:rPr>
+              <a:t>• Security: identity, sandboxing, kill switches, audit trail</a:t>
+            </a:r>
+            <a:endParaRPr lang="en-US" sz="1100" dirty="0"/>
+          </a:p>
+        </p:txBody>
+      </p:sp>
+      <p:sp>
+        <p:nvSpPr>
+          <p:cNvPr id="20" name="Text 18"/>
+          <p:cNvSpPr/>
+          <p:nvPr/>
+        </p:nvSpPr>
+        <p:spPr>
+          <a:xfrm>
+            <a:off x="4754880" y="2889504"/>
+            <a:ext cx="3977640" cy="384048"/>
+          </a:xfrm>
+          <a:prstGeom prst="rect">
+            <a:avLst/>
+          </a:prstGeom>
+          <a:noFill/>
+          <a:ln/>
+        </p:spPr>
+        <p:txBody>
+          <a:bodyPr wrap="square" lIns="0" tIns="0" rIns="0" bIns="0" rtlCol="0" anchor="ctr"/>
+          <a:lstStyle/>
+          <a:p>
+            <a:pPr indent="0" marL="0">
+              <a:buNone/>
+            </a:pPr>
+            <a:r>
+              <a:rPr lang="en-US" sz="1100" dirty="0">
+                <a:solidFill>
+                  <a:srgbClr val="D4E4F0"/>
+                </a:solidFill>
+              </a:rPr>
+              <a:t>• Governance: HITL gates, compliance, data retention</a:t>
+            </a:r>
+            <a:endParaRPr lang="en-US" sz="1100" dirty="0"/>
+          </a:p>
+        </p:txBody>
+      </p:sp>
+      <p:sp>
+        <p:nvSpPr>
+          <p:cNvPr id="21" name="Text 19"/>
+          <p:cNvSpPr/>
+          <p:nvPr/>
+        </p:nvSpPr>
+        <p:spPr>
+          <a:xfrm>
+            <a:off x="4754880" y="3328416"/>
+            <a:ext cx="3977640" cy="384048"/>
+          </a:xfrm>
+          <a:prstGeom prst="rect">
+            <a:avLst/>
+          </a:prstGeom>
+          <a:noFill/>
+          <a:ln/>
+        </p:spPr>
+        <p:txBody>
+          <a:bodyPr wrap="square" lIns="0" tIns="0" rIns="0" bIns="0" rtlCol="0" anchor="ctr"/>
+          <a:lstStyle/>
+          <a:p>
+            <a:pPr indent="0" marL="0">
+              <a:buNone/>
+            </a:pPr>
+            <a:r>
+              <a:rPr lang="en-US" sz="1100" dirty="0">
+                <a:solidFill>
+                  <a:srgbClr val="D4E4F0"/>
+                </a:solidFill>
+              </a:rPr>
+              <a:t>• FinOps: cost-per-unit model, budget guardrails, routing</a:t>
+            </a:r>
+            <a:endParaRPr lang="en-US" sz="1100" dirty="0"/>
+          </a:p>
+        </p:txBody>
+      </p:sp>
+      <p:sp>
+        <p:nvSpPr>
+          <p:cNvPr id="22" name="Text 20"/>
+          <p:cNvSpPr/>
+          <p:nvPr/>
+        </p:nvSpPr>
+        <p:spPr>
+          <a:xfrm>
+            <a:off x="4754880" y="3767328"/>
+            <a:ext cx="3977640" cy="384048"/>
+          </a:xfrm>
+          <a:prstGeom prst="rect">
+            <a:avLst/>
+          </a:prstGeom>
+          <a:noFill/>
+          <a:ln/>
+        </p:spPr>
+        <p:txBody>
+          <a:bodyPr wrap="square" lIns="0" tIns="0" rIns="0" bIns="0" rtlCol="0" anchor="ctr"/>
+          <a:lstStyle/>
+          <a:p>
+            <a:pPr indent="0" marL="0">
+              <a:buNone/>
+            </a:pPr>
+            <a:r>
+              <a:rPr lang="en-US" sz="1100" dirty="0">
+                <a:solidFill>
+                  <a:srgbClr val="D4E4F0"/>
+                </a:solidFill>
+              </a:rPr>
+              <a:t>• Shadow mode rollout before full production traffic</a:t>
+            </a:r>
+            <a:endParaRPr lang="en-US" sz="1100" dirty="0"/>
+          </a:p>
+        </p:txBody>
+      </p:sp>
+      <p:sp>
+        <p:nvSpPr>
+          <p:cNvPr id="23" name="Shape 21"/>
+          <p:cNvSpPr/>
+          <p:nvPr/>
+        </p:nvSpPr>
+        <p:spPr>
+          <a:xfrm>
+            <a:off x="320040" y="4626864"/>
+            <a:ext cx="8503920" cy="347472"/>
+          </a:xfrm>
+          <a:prstGeom prst="rect">
+            <a:avLst/>
+          </a:prstGeom>
+          <a:solidFill>
+            <a:srgbClr val="3A7DC9">
+              <a:alpha val="82000"/>
             </a:srgbClr>
           </a:solidFill>
           <a:ln/>
@@ -9972,14 +10201,14 @@
       </p:sp>
       <p:sp>
         <p:nvSpPr>
-          <p:cNvPr id="29" name="Text 25"/>
-          <p:cNvSpPr/>
-          <p:nvPr/>
-        </p:nvSpPr>
-        <p:spPr>
-          <a:xfrm>
-            <a:off x="4773168" y="1682496"/>
-            <a:ext cx="219456" cy="201168"/>
+          <p:cNvPr id="24" name="Text 22"/>
+          <p:cNvSpPr/>
+          <p:nvPr/>
+        </p:nvSpPr>
+        <p:spPr>
+          <a:xfrm>
+            <a:off x="320040" y="4626864"/>
+            <a:ext cx="8503920" cy="347472"/>
           </a:xfrm>
           <a:prstGeom prst="rect">
             <a:avLst/>
@@ -9995,1580 +10224,14 @@
               <a:buNone/>
             </a:pPr>
             <a:r>
-              <a:rPr lang="en-US" sz="1000" dirty="0">
-                <a:solidFill>
-                  <a:srgbClr val="4A7FA8"/>
-                </a:solidFill>
-              </a:rPr>
-              <a:t>□</a:t>
-            </a:r>
-            <a:endParaRPr lang="en-US" sz="1000" dirty="0"/>
-          </a:p>
-        </p:txBody>
-      </p:sp>
-      <p:sp>
-        <p:nvSpPr>
-          <p:cNvPr id="30" name="Text 26"/>
-          <p:cNvSpPr/>
-          <p:nvPr/>
-        </p:nvSpPr>
-        <p:spPr>
-          <a:xfrm>
-            <a:off x="5065776" y="1682496"/>
-            <a:ext cx="3648456" cy="219456"/>
-          </a:xfrm>
-          <a:prstGeom prst="rect">
-            <a:avLst/>
-          </a:prstGeom>
-          <a:noFill/>
-          <a:ln/>
-        </p:spPr>
-        <p:txBody>
-          <a:bodyPr wrap="square" lIns="0" tIns="0" rIns="0" bIns="0" rtlCol="0" anchor="ctr"/>
-          <a:lstStyle/>
-          <a:p>
-            <a:pPr indent="0" marL="0">
-              <a:buNone/>
-            </a:pPr>
-            <a:r>
-              <a:rPr lang="en-US" sz="1050" dirty="0">
-                <a:solidFill>
-                  <a:srgbClr val="1E2D3D"/>
-                </a:solidFill>
-              </a:rPr>
-              <a:t>Are all APIs exposed as OpenAPI schemas?</a:t>
-            </a:r>
-            <a:endParaRPr lang="en-US" sz="1050" dirty="0"/>
-          </a:p>
-        </p:txBody>
-      </p:sp>
-      <p:sp>
-        <p:nvSpPr>
-          <p:cNvPr id="31" name="Shape 27"/>
-          <p:cNvSpPr/>
-          <p:nvPr/>
-        </p:nvSpPr>
-        <p:spPr>
-          <a:xfrm>
-            <a:off x="4773168" y="1938528"/>
-            <a:ext cx="219456" cy="201168"/>
-          </a:xfrm>
-          <a:prstGeom prst="rect">
-            <a:avLst/>
-          </a:prstGeom>
-          <a:solidFill>
-            <a:srgbClr val="4A7FA8">
-              <a:alpha val="20000"/>
-            </a:srgbClr>
-          </a:solidFill>
-          <a:ln/>
-        </p:spPr>
-      </p:sp>
-      <p:sp>
-        <p:nvSpPr>
-          <p:cNvPr id="32" name="Text 28"/>
-          <p:cNvSpPr/>
-          <p:nvPr/>
-        </p:nvSpPr>
-        <p:spPr>
-          <a:xfrm>
-            <a:off x="4773168" y="1938528"/>
-            <a:ext cx="219456" cy="201168"/>
-          </a:xfrm>
-          <a:prstGeom prst="rect">
-            <a:avLst/>
-          </a:prstGeom>
-          <a:noFill/>
-          <a:ln/>
-        </p:spPr>
-        <p:txBody>
-          <a:bodyPr wrap="square" lIns="0" tIns="0" rIns="0" bIns="0" rtlCol="0" anchor="ctr"/>
-          <a:lstStyle/>
-          <a:p>
-            <a:pPr algn="ctr" indent="0" marL="0">
-              <a:buNone/>
-            </a:pPr>
-            <a:r>
-              <a:rPr lang="en-US" sz="1000" dirty="0">
-                <a:solidFill>
-                  <a:srgbClr val="4A7FA8"/>
-                </a:solidFill>
-              </a:rPr>
-              <a:t>□</a:t>
-            </a:r>
-            <a:endParaRPr lang="en-US" sz="1000" dirty="0"/>
-          </a:p>
-        </p:txBody>
-      </p:sp>
-      <p:sp>
-        <p:nvSpPr>
-          <p:cNvPr id="33" name="Text 29"/>
-          <p:cNvSpPr/>
-          <p:nvPr/>
-        </p:nvSpPr>
-        <p:spPr>
-          <a:xfrm>
-            <a:off x="5065776" y="1938528"/>
-            <a:ext cx="3648456" cy="219456"/>
-          </a:xfrm>
-          <a:prstGeom prst="rect">
-            <a:avLst/>
-          </a:prstGeom>
-          <a:noFill/>
-          <a:ln/>
-        </p:spPr>
-        <p:txBody>
-          <a:bodyPr wrap="square" lIns="0" tIns="0" rIns="0" bIns="0" rtlCol="0" anchor="ctr"/>
-          <a:lstStyle/>
-          <a:p>
-            <a:pPr indent="0" marL="0">
-              <a:buNone/>
-            </a:pPr>
-            <a:r>
-              <a:rPr lang="en-US" sz="1050" dirty="0">
-                <a:solidFill>
-                  <a:srgbClr val="1E2D3D"/>
-                </a:solidFill>
-              </a:rPr>
-              <a:t>Is llms.txt created for this service?</a:t>
-            </a:r>
-            <a:endParaRPr lang="en-US" sz="1050" dirty="0"/>
-          </a:p>
-        </p:txBody>
-      </p:sp>
-      <p:sp>
-        <p:nvSpPr>
-          <p:cNvPr id="34" name="Shape 30"/>
-          <p:cNvSpPr/>
-          <p:nvPr/>
-        </p:nvSpPr>
-        <p:spPr>
-          <a:xfrm>
-            <a:off x="4773168" y="2194560"/>
-            <a:ext cx="219456" cy="201168"/>
-          </a:xfrm>
-          <a:prstGeom prst="rect">
-            <a:avLst/>
-          </a:prstGeom>
-          <a:solidFill>
-            <a:srgbClr val="4A7FA8">
-              <a:alpha val="20000"/>
-            </a:srgbClr>
-          </a:solidFill>
-          <a:ln/>
-        </p:spPr>
-      </p:sp>
-      <p:sp>
-        <p:nvSpPr>
-          <p:cNvPr id="35" name="Text 31"/>
-          <p:cNvSpPr/>
-          <p:nvPr/>
-        </p:nvSpPr>
-        <p:spPr>
-          <a:xfrm>
-            <a:off x="4773168" y="2194560"/>
-            <a:ext cx="219456" cy="201168"/>
-          </a:xfrm>
-          <a:prstGeom prst="rect">
-            <a:avLst/>
-          </a:prstGeom>
-          <a:noFill/>
-          <a:ln/>
-        </p:spPr>
-        <p:txBody>
-          <a:bodyPr wrap="square" lIns="0" tIns="0" rIns="0" bIns="0" rtlCol="0" anchor="ctr"/>
-          <a:lstStyle/>
-          <a:p>
-            <a:pPr algn="ctr" indent="0" marL="0">
-              <a:buNone/>
-            </a:pPr>
-            <a:r>
-              <a:rPr lang="en-US" sz="1000" dirty="0">
-                <a:solidFill>
-                  <a:srgbClr val="4A7FA8"/>
-                </a:solidFill>
-              </a:rPr>
-              <a:t>□</a:t>
-            </a:r>
-            <a:endParaRPr lang="en-US" sz="1000" dirty="0"/>
-          </a:p>
-        </p:txBody>
-      </p:sp>
-      <p:sp>
-        <p:nvSpPr>
-          <p:cNvPr id="36" name="Text 32"/>
-          <p:cNvSpPr/>
-          <p:nvPr/>
-        </p:nvSpPr>
-        <p:spPr>
-          <a:xfrm>
-            <a:off x="5065776" y="2194560"/>
-            <a:ext cx="3648456" cy="219456"/>
-          </a:xfrm>
-          <a:prstGeom prst="rect">
-            <a:avLst/>
-          </a:prstGeom>
-          <a:noFill/>
-          <a:ln/>
-        </p:spPr>
-        <p:txBody>
-          <a:bodyPr wrap="square" lIns="0" tIns="0" rIns="0" bIns="0" rtlCol="0" anchor="ctr"/>
-          <a:lstStyle/>
-          <a:p>
-            <a:pPr indent="0" marL="0">
-              <a:buNone/>
-            </a:pPr>
-            <a:r>
-              <a:rPr lang="en-US" sz="1050" dirty="0">
-                <a:solidFill>
-                  <a:srgbClr val="1E2D3D"/>
-                </a:solidFill>
-              </a:rPr>
-              <a:t>Are tool definitions MCP-compatible?</a:t>
-            </a:r>
-            <a:endParaRPr lang="en-US" sz="1050" dirty="0"/>
-          </a:p>
-        </p:txBody>
-      </p:sp>
-      <p:sp>
-        <p:nvSpPr>
-          <p:cNvPr id="37" name="Shape 33"/>
-          <p:cNvSpPr/>
-          <p:nvPr/>
-        </p:nvSpPr>
-        <p:spPr>
-          <a:xfrm>
-            <a:off x="4773168" y="2450592"/>
-            <a:ext cx="219456" cy="201168"/>
-          </a:xfrm>
-          <a:prstGeom prst="rect">
-            <a:avLst/>
-          </a:prstGeom>
-          <a:solidFill>
-            <a:srgbClr val="4A7FA8">
-              <a:alpha val="20000"/>
-            </a:srgbClr>
-          </a:solidFill>
-          <a:ln/>
-        </p:spPr>
-      </p:sp>
-      <p:sp>
-        <p:nvSpPr>
-          <p:cNvPr id="38" name="Text 34"/>
-          <p:cNvSpPr/>
-          <p:nvPr/>
-        </p:nvSpPr>
-        <p:spPr>
-          <a:xfrm>
-            <a:off x="4773168" y="2450592"/>
-            <a:ext cx="219456" cy="201168"/>
-          </a:xfrm>
-          <a:prstGeom prst="rect">
-            <a:avLst/>
-          </a:prstGeom>
-          <a:noFill/>
-          <a:ln/>
-        </p:spPr>
-        <p:txBody>
-          <a:bodyPr wrap="square" lIns="0" tIns="0" rIns="0" bIns="0" rtlCol="0" anchor="ctr"/>
-          <a:lstStyle/>
-          <a:p>
-            <a:pPr algn="ctr" indent="0" marL="0">
-              <a:buNone/>
-            </a:pPr>
-            <a:r>
-              <a:rPr lang="en-US" sz="1000" dirty="0">
-                <a:solidFill>
-                  <a:srgbClr val="4A7FA8"/>
-                </a:solidFill>
-              </a:rPr>
-              <a:t>□</a:t>
-            </a:r>
-            <a:endParaRPr lang="en-US" sz="1000" dirty="0"/>
-          </a:p>
-        </p:txBody>
-      </p:sp>
-      <p:sp>
-        <p:nvSpPr>
-          <p:cNvPr id="39" name="Text 35"/>
-          <p:cNvSpPr/>
-          <p:nvPr/>
-        </p:nvSpPr>
-        <p:spPr>
-          <a:xfrm>
-            <a:off x="5065776" y="2450592"/>
-            <a:ext cx="3648456" cy="219456"/>
-          </a:xfrm>
-          <a:prstGeom prst="rect">
-            <a:avLst/>
-          </a:prstGeom>
-          <a:noFill/>
-          <a:ln/>
-        </p:spPr>
-        <p:txBody>
-          <a:bodyPr wrap="square" lIns="0" tIns="0" rIns="0" bIns="0" rtlCol="0" anchor="ctr"/>
-          <a:lstStyle/>
-          <a:p>
-            <a:pPr indent="0" marL="0">
-              <a:buNone/>
-            </a:pPr>
-            <a:r>
-              <a:rPr lang="en-US" sz="1050" dirty="0">
-                <a:solidFill>
-                  <a:srgbClr val="1E2D3D"/>
-                </a:solidFill>
-              </a:rPr>
-              <a:t>Are all I/O types strongly typed?</a:t>
-            </a:r>
-            <a:endParaRPr lang="en-US" sz="1050" dirty="0"/>
-          </a:p>
-        </p:txBody>
-      </p:sp>
-      <p:sp>
-        <p:nvSpPr>
-          <p:cNvPr id="40" name="Shape 36"/>
-          <p:cNvSpPr/>
-          <p:nvPr/>
-        </p:nvSpPr>
-        <p:spPr>
-          <a:xfrm>
-            <a:off x="4773168" y="2706624"/>
-            <a:ext cx="219456" cy="201168"/>
-          </a:xfrm>
-          <a:prstGeom prst="rect">
-            <a:avLst/>
-          </a:prstGeom>
-          <a:solidFill>
-            <a:srgbClr val="4A7FA8">
-              <a:alpha val="20000"/>
-            </a:srgbClr>
-          </a:solidFill>
-          <a:ln/>
-        </p:spPr>
-      </p:sp>
-      <p:sp>
-        <p:nvSpPr>
-          <p:cNvPr id="41" name="Text 37"/>
-          <p:cNvSpPr/>
-          <p:nvPr/>
-        </p:nvSpPr>
-        <p:spPr>
-          <a:xfrm>
-            <a:off x="4773168" y="2706624"/>
-            <a:ext cx="219456" cy="201168"/>
-          </a:xfrm>
-          <a:prstGeom prst="rect">
-            <a:avLst/>
-          </a:prstGeom>
-          <a:noFill/>
-          <a:ln/>
-        </p:spPr>
-        <p:txBody>
-          <a:bodyPr wrap="square" lIns="0" tIns="0" rIns="0" bIns="0" rtlCol="0" anchor="ctr"/>
-          <a:lstStyle/>
-          <a:p>
-            <a:pPr algn="ctr" indent="0" marL="0">
-              <a:buNone/>
-            </a:pPr>
-            <a:r>
-              <a:rPr lang="en-US" sz="1000" dirty="0">
-                <a:solidFill>
-                  <a:srgbClr val="4A7FA8"/>
-                </a:solidFill>
-              </a:rPr>
-              <a:t>□</a:t>
-            </a:r>
-            <a:endParaRPr lang="en-US" sz="1000" dirty="0"/>
-          </a:p>
-        </p:txBody>
-      </p:sp>
-      <p:sp>
-        <p:nvSpPr>
-          <p:cNvPr id="42" name="Text 38"/>
-          <p:cNvSpPr/>
-          <p:nvPr/>
-        </p:nvSpPr>
-        <p:spPr>
-          <a:xfrm>
-            <a:off x="5065776" y="2706624"/>
-            <a:ext cx="3648456" cy="219456"/>
-          </a:xfrm>
-          <a:prstGeom prst="rect">
-            <a:avLst/>
-          </a:prstGeom>
-          <a:noFill/>
-          <a:ln/>
-        </p:spPr>
-        <p:txBody>
-          <a:bodyPr wrap="square" lIns="0" tIns="0" rIns="0" bIns="0" rtlCol="0" anchor="ctr"/>
-          <a:lstStyle/>
-          <a:p>
-            <a:pPr indent="0" marL="0">
-              <a:buNone/>
-            </a:pPr>
-            <a:r>
-              <a:rPr lang="en-US" sz="1050" dirty="0">
-                <a:solidFill>
-                  <a:srgbClr val="1E2D3D"/>
-                </a:solidFill>
-              </a:rPr>
-              <a:t>Is CLAUDE.md &lt;300 lines, universal rules only?</a:t>
-            </a:r>
-            <a:endParaRPr lang="en-US" sz="1050" dirty="0"/>
-          </a:p>
-        </p:txBody>
-      </p:sp>
-      <p:sp>
-        <p:nvSpPr>
-          <p:cNvPr id="43" name="Shape 39"/>
-          <p:cNvSpPr/>
-          <p:nvPr/>
-        </p:nvSpPr>
-        <p:spPr>
-          <a:xfrm>
-            <a:off x="320040" y="3090672"/>
-            <a:ext cx="4160520" cy="1773936"/>
-          </a:xfrm>
-          <a:prstGeom prst="rect">
-            <a:avLst/>
-          </a:prstGeom>
-          <a:solidFill>
-            <a:srgbClr val="F3F6F9"/>
-          </a:solidFill>
-          <a:ln/>
-          <a:effectLst>
-            <a:outerShdw sx="100000" sy="100000" kx="0" ky="0" algn="bl" rotWithShape="0" blurRad="101600" dist="38100" dir="8100000">
-              <a:srgbClr val="000000">
-                <a:alpha val="13000"/>
-              </a:srgbClr>
-            </a:outerShdw>
-          </a:effectLst>
-        </p:spPr>
-      </p:sp>
-      <p:sp>
-        <p:nvSpPr>
-          <p:cNvPr id="44" name="Shape 40"/>
-          <p:cNvSpPr/>
-          <p:nvPr/>
-        </p:nvSpPr>
-        <p:spPr>
-          <a:xfrm>
-            <a:off x="320040" y="3090672"/>
-            <a:ext cx="4160520" cy="438912"/>
-          </a:xfrm>
-          <a:prstGeom prst="rect">
-            <a:avLst/>
-          </a:prstGeom>
-          <a:solidFill>
-            <a:srgbClr val="3A7DC9"/>
-          </a:solidFill>
-          <a:ln/>
-        </p:spPr>
-      </p:sp>
-      <p:pic>
-        <p:nvPicPr>
-          <p:cNvPr id="45" name="Image 2" descr="preencoded.png">    </p:cNvPr>
-          <p:cNvPicPr>
-            <a:picLocks noChangeAspect="1"/>
-          </p:cNvPicPr>
-          <p:nvPr/>
-        </p:nvPicPr>
-        <p:blipFill>
-          <a:blip r:embed="rId3"/>
-          <a:stretch>
-            <a:fillRect/>
-          </a:stretch>
-        </p:blipFill>
-        <p:spPr>
-          <a:xfrm>
-            <a:off x="457200" y="3182112"/>
-            <a:ext cx="256032" cy="256032"/>
-          </a:xfrm>
-          <a:prstGeom prst="rect">
-            <a:avLst/>
-          </a:prstGeom>
-        </p:spPr>
-      </p:pic>
-      <p:sp>
-        <p:nvSpPr>
-          <p:cNvPr id="46" name="Text 41"/>
-          <p:cNvSpPr/>
-          <p:nvPr/>
-        </p:nvSpPr>
-        <p:spPr>
-          <a:xfrm>
-            <a:off x="777240" y="3090672"/>
-            <a:ext cx="3611880" cy="438912"/>
-          </a:xfrm>
-          <a:prstGeom prst="rect">
-            <a:avLst/>
-          </a:prstGeom>
-          <a:noFill/>
-          <a:ln/>
-        </p:spPr>
-        <p:txBody>
-          <a:bodyPr wrap="square" lIns="0" tIns="0" rIns="0" bIns="0" rtlCol="0" anchor="ctr"/>
-          <a:lstStyle/>
-          <a:p>
-            <a:pPr indent="0" marL="0">
-              <a:buNone/>
-            </a:pPr>
-            <a:r>
-              <a:rPr lang="en-US" sz="1400" b="1" dirty="0">
+              <a:rPr lang="en-US" sz="1200" b="1" dirty="0">
                 <a:solidFill>
                   <a:srgbClr val="FFFFFF"/>
                 </a:solidFill>
               </a:rPr>
-              <a:t>Security</a:t>
-            </a:r>
-            <a:endParaRPr lang="en-US" sz="1400" dirty="0"/>
-          </a:p>
-        </p:txBody>
-      </p:sp>
-      <p:sp>
-        <p:nvSpPr>
-          <p:cNvPr id="47" name="Shape 42"/>
-          <p:cNvSpPr/>
-          <p:nvPr/>
-        </p:nvSpPr>
-        <p:spPr>
-          <a:xfrm>
-            <a:off x="429768" y="3602736"/>
-            <a:ext cx="219456" cy="201168"/>
-          </a:xfrm>
-          <a:prstGeom prst="rect">
-            <a:avLst/>
-          </a:prstGeom>
-          <a:solidFill>
-            <a:srgbClr val="3A7DC9">
-              <a:alpha val="20000"/>
-            </a:srgbClr>
-          </a:solidFill>
-          <a:ln/>
-        </p:spPr>
-      </p:sp>
-      <p:sp>
-        <p:nvSpPr>
-          <p:cNvPr id="48" name="Text 43"/>
-          <p:cNvSpPr/>
-          <p:nvPr/>
-        </p:nvSpPr>
-        <p:spPr>
-          <a:xfrm>
-            <a:off x="429768" y="3602736"/>
-            <a:ext cx="219456" cy="201168"/>
-          </a:xfrm>
-          <a:prstGeom prst="rect">
-            <a:avLst/>
-          </a:prstGeom>
-          <a:noFill/>
-          <a:ln/>
-        </p:spPr>
-        <p:txBody>
-          <a:bodyPr wrap="square" lIns="0" tIns="0" rIns="0" bIns="0" rtlCol="0" anchor="ctr"/>
-          <a:lstStyle/>
-          <a:p>
-            <a:pPr algn="ctr" indent="0" marL="0">
-              <a:buNone/>
-            </a:pPr>
-            <a:r>
-              <a:rPr lang="en-US" sz="1000" dirty="0">
-                <a:solidFill>
-                  <a:srgbClr val="3A7DC9"/>
-                </a:solidFill>
-              </a:rPr>
-              <a:t>□</a:t>
-            </a:r>
-            <a:endParaRPr lang="en-US" sz="1000" dirty="0"/>
-          </a:p>
-        </p:txBody>
-      </p:sp>
-      <p:sp>
-        <p:nvSpPr>
-          <p:cNvPr id="49" name="Text 44"/>
-          <p:cNvSpPr/>
-          <p:nvPr/>
-        </p:nvSpPr>
-        <p:spPr>
-          <a:xfrm>
-            <a:off x="722376" y="3602736"/>
-            <a:ext cx="3648456" cy="219456"/>
-          </a:xfrm>
-          <a:prstGeom prst="rect">
-            <a:avLst/>
-          </a:prstGeom>
-          <a:noFill/>
-          <a:ln/>
-        </p:spPr>
-        <p:txBody>
-          <a:bodyPr wrap="square" lIns="0" tIns="0" rIns="0" bIns="0" rtlCol="0" anchor="ctr"/>
-          <a:lstStyle/>
-          <a:p>
-            <a:pPr indent="0" marL="0">
-              <a:buNone/>
-            </a:pPr>
-            <a:r>
-              <a:rPr lang="en-US" sz="1050" dirty="0">
-                <a:solidFill>
-                  <a:srgbClr val="1E2D3D"/>
-                </a:solidFill>
-              </a:rPr>
-              <a:t>Is agent identity defined (not shared creds)?</a:t>
-            </a:r>
-            <a:endParaRPr lang="en-US" sz="1050" dirty="0"/>
-          </a:p>
-        </p:txBody>
-      </p:sp>
-      <p:sp>
-        <p:nvSpPr>
-          <p:cNvPr id="50" name="Shape 45"/>
-          <p:cNvSpPr/>
-          <p:nvPr/>
-        </p:nvSpPr>
-        <p:spPr>
-          <a:xfrm>
-            <a:off x="429768" y="3858768"/>
-            <a:ext cx="219456" cy="201168"/>
-          </a:xfrm>
-          <a:prstGeom prst="rect">
-            <a:avLst/>
-          </a:prstGeom>
-          <a:solidFill>
-            <a:srgbClr val="3A7DC9">
-              <a:alpha val="20000"/>
-            </a:srgbClr>
-          </a:solidFill>
-          <a:ln/>
-        </p:spPr>
-      </p:sp>
-      <p:sp>
-        <p:nvSpPr>
-          <p:cNvPr id="51" name="Text 46"/>
-          <p:cNvSpPr/>
-          <p:nvPr/>
-        </p:nvSpPr>
-        <p:spPr>
-          <a:xfrm>
-            <a:off x="429768" y="3858768"/>
-            <a:ext cx="219456" cy="201168"/>
-          </a:xfrm>
-          <a:prstGeom prst="rect">
-            <a:avLst/>
-          </a:prstGeom>
-          <a:noFill/>
-          <a:ln/>
-        </p:spPr>
-        <p:txBody>
-          <a:bodyPr wrap="square" lIns="0" tIns="0" rIns="0" bIns="0" rtlCol="0" anchor="ctr"/>
-          <a:lstStyle/>
-          <a:p>
-            <a:pPr algn="ctr" indent="0" marL="0">
-              <a:buNone/>
-            </a:pPr>
-            <a:r>
-              <a:rPr lang="en-US" sz="1000" dirty="0">
-                <a:solidFill>
-                  <a:srgbClr val="3A7DC9"/>
-                </a:solidFill>
-              </a:rPr>
-              <a:t>□</a:t>
-            </a:r>
-            <a:endParaRPr lang="en-US" sz="1000" dirty="0"/>
-          </a:p>
-        </p:txBody>
-      </p:sp>
-      <p:sp>
-        <p:nvSpPr>
-          <p:cNvPr id="52" name="Text 47"/>
-          <p:cNvSpPr/>
-          <p:nvPr/>
-        </p:nvSpPr>
-        <p:spPr>
-          <a:xfrm>
-            <a:off x="722376" y="3858768"/>
-            <a:ext cx="3648456" cy="219456"/>
-          </a:xfrm>
-          <a:prstGeom prst="rect">
-            <a:avLst/>
-          </a:prstGeom>
-          <a:noFill/>
-          <a:ln/>
-        </p:spPr>
-        <p:txBody>
-          <a:bodyPr wrap="square" lIns="0" tIns="0" rIns="0" bIns="0" rtlCol="0" anchor="ctr"/>
-          <a:lstStyle/>
-          <a:p>
-            <a:pPr indent="0" marL="0">
-              <a:buNone/>
-            </a:pPr>
-            <a:r>
-              <a:rPr lang="en-US" sz="1050" dirty="0">
-                <a:solidFill>
-                  <a:srgbClr val="1E2D3D"/>
-                </a:solidFill>
-              </a:rPr>
-              <a:t>Is sandboxing designed (container, egress)?</a:t>
-            </a:r>
-            <a:endParaRPr lang="en-US" sz="1050" dirty="0"/>
-          </a:p>
-        </p:txBody>
-      </p:sp>
-      <p:sp>
-        <p:nvSpPr>
-          <p:cNvPr id="53" name="Shape 48"/>
-          <p:cNvSpPr/>
-          <p:nvPr/>
-        </p:nvSpPr>
-        <p:spPr>
-          <a:xfrm>
-            <a:off x="429768" y="4114800"/>
-            <a:ext cx="219456" cy="201168"/>
-          </a:xfrm>
-          <a:prstGeom prst="rect">
-            <a:avLst/>
-          </a:prstGeom>
-          <a:solidFill>
-            <a:srgbClr val="3A7DC9">
-              <a:alpha val="20000"/>
-            </a:srgbClr>
-          </a:solidFill>
-          <a:ln/>
-        </p:spPr>
-      </p:sp>
-      <p:sp>
-        <p:nvSpPr>
-          <p:cNvPr id="54" name="Text 49"/>
-          <p:cNvSpPr/>
-          <p:nvPr/>
-        </p:nvSpPr>
-        <p:spPr>
-          <a:xfrm>
-            <a:off x="429768" y="4114800"/>
-            <a:ext cx="219456" cy="201168"/>
-          </a:xfrm>
-          <a:prstGeom prst="rect">
-            <a:avLst/>
-          </a:prstGeom>
-          <a:noFill/>
-          <a:ln/>
-        </p:spPr>
-        <p:txBody>
-          <a:bodyPr wrap="square" lIns="0" tIns="0" rIns="0" bIns="0" rtlCol="0" anchor="ctr"/>
-          <a:lstStyle/>
-          <a:p>
-            <a:pPr algn="ctr" indent="0" marL="0">
-              <a:buNone/>
-            </a:pPr>
-            <a:r>
-              <a:rPr lang="en-US" sz="1000" dirty="0">
-                <a:solidFill>
-                  <a:srgbClr val="3A7DC9"/>
-                </a:solidFill>
-              </a:rPr>
-              <a:t>□</a:t>
-            </a:r>
-            <a:endParaRPr lang="en-US" sz="1000" dirty="0"/>
-          </a:p>
-        </p:txBody>
-      </p:sp>
-      <p:sp>
-        <p:nvSpPr>
-          <p:cNvPr id="55" name="Text 50"/>
-          <p:cNvSpPr/>
-          <p:nvPr/>
-        </p:nvSpPr>
-        <p:spPr>
-          <a:xfrm>
-            <a:off x="722376" y="4114800"/>
-            <a:ext cx="3648456" cy="219456"/>
-          </a:xfrm>
-          <a:prstGeom prst="rect">
-            <a:avLst/>
-          </a:prstGeom>
-          <a:noFill/>
-          <a:ln/>
-        </p:spPr>
-        <p:txBody>
-          <a:bodyPr wrap="square" lIns="0" tIns="0" rIns="0" bIns="0" rtlCol="0" anchor="ctr"/>
-          <a:lstStyle/>
-          <a:p>
-            <a:pPr indent="0" marL="0">
-              <a:buNone/>
-            </a:pPr>
-            <a:r>
-              <a:rPr lang="en-US" sz="1050" dirty="0">
-                <a:solidFill>
-                  <a:srgbClr val="1E2D3D"/>
-                </a:solidFill>
-              </a:rPr>
-              <a:t>Are HITL gates placed at irreversible actions?</a:t>
-            </a:r>
-            <a:endParaRPr lang="en-US" sz="1050" dirty="0"/>
-          </a:p>
-        </p:txBody>
-      </p:sp>
-      <p:sp>
-        <p:nvSpPr>
-          <p:cNvPr id="56" name="Shape 51"/>
-          <p:cNvSpPr/>
-          <p:nvPr/>
-        </p:nvSpPr>
-        <p:spPr>
-          <a:xfrm>
-            <a:off x="429768" y="4370832"/>
-            <a:ext cx="219456" cy="201168"/>
-          </a:xfrm>
-          <a:prstGeom prst="rect">
-            <a:avLst/>
-          </a:prstGeom>
-          <a:solidFill>
-            <a:srgbClr val="3A7DC9">
-              <a:alpha val="20000"/>
-            </a:srgbClr>
-          </a:solidFill>
-          <a:ln/>
-        </p:spPr>
-      </p:sp>
-      <p:sp>
-        <p:nvSpPr>
-          <p:cNvPr id="57" name="Text 52"/>
-          <p:cNvSpPr/>
-          <p:nvPr/>
-        </p:nvSpPr>
-        <p:spPr>
-          <a:xfrm>
-            <a:off x="429768" y="4370832"/>
-            <a:ext cx="219456" cy="201168"/>
-          </a:xfrm>
-          <a:prstGeom prst="rect">
-            <a:avLst/>
-          </a:prstGeom>
-          <a:noFill/>
-          <a:ln/>
-        </p:spPr>
-        <p:txBody>
-          <a:bodyPr wrap="square" lIns="0" tIns="0" rIns="0" bIns="0" rtlCol="0" anchor="ctr"/>
-          <a:lstStyle/>
-          <a:p>
-            <a:pPr algn="ctr" indent="0" marL="0">
-              <a:buNone/>
-            </a:pPr>
-            <a:r>
-              <a:rPr lang="en-US" sz="1000" dirty="0">
-                <a:solidFill>
-                  <a:srgbClr val="3A7DC9"/>
-                </a:solidFill>
-              </a:rPr>
-              <a:t>□</a:t>
-            </a:r>
-            <a:endParaRPr lang="en-US" sz="1000" dirty="0"/>
-          </a:p>
-        </p:txBody>
-      </p:sp>
-      <p:sp>
-        <p:nvSpPr>
-          <p:cNvPr id="58" name="Text 53"/>
-          <p:cNvSpPr/>
-          <p:nvPr/>
-        </p:nvSpPr>
-        <p:spPr>
-          <a:xfrm>
-            <a:off x="722376" y="4370832"/>
-            <a:ext cx="3648456" cy="219456"/>
-          </a:xfrm>
-          <a:prstGeom prst="rect">
-            <a:avLst/>
-          </a:prstGeom>
-          <a:noFill/>
-          <a:ln/>
-        </p:spPr>
-        <p:txBody>
-          <a:bodyPr wrap="square" lIns="0" tIns="0" rIns="0" bIns="0" rtlCol="0" anchor="ctr"/>
-          <a:lstStyle/>
-          <a:p>
-            <a:pPr indent="0" marL="0">
-              <a:buNone/>
-            </a:pPr>
-            <a:r>
-              <a:rPr lang="en-US" sz="1050" dirty="0">
-                <a:solidFill>
-                  <a:srgbClr val="1E2D3D"/>
-                </a:solidFill>
-              </a:rPr>
-              <a:t>Is kill switch mechanism defined and tested?</a:t>
-            </a:r>
-            <a:endParaRPr lang="en-US" sz="1050" dirty="0"/>
-          </a:p>
-        </p:txBody>
-      </p:sp>
-      <p:sp>
-        <p:nvSpPr>
-          <p:cNvPr id="59" name="Shape 54"/>
-          <p:cNvSpPr/>
-          <p:nvPr/>
-        </p:nvSpPr>
-        <p:spPr>
-          <a:xfrm>
-            <a:off x="429768" y="4626864"/>
-            <a:ext cx="219456" cy="201168"/>
-          </a:xfrm>
-          <a:prstGeom prst="rect">
-            <a:avLst/>
-          </a:prstGeom>
-          <a:solidFill>
-            <a:srgbClr val="3A7DC9">
-              <a:alpha val="20000"/>
-            </a:srgbClr>
-          </a:solidFill>
-          <a:ln/>
-        </p:spPr>
-      </p:sp>
-      <p:sp>
-        <p:nvSpPr>
-          <p:cNvPr id="60" name="Text 55"/>
-          <p:cNvSpPr/>
-          <p:nvPr/>
-        </p:nvSpPr>
-        <p:spPr>
-          <a:xfrm>
-            <a:off x="429768" y="4626864"/>
-            <a:ext cx="219456" cy="201168"/>
-          </a:xfrm>
-          <a:prstGeom prst="rect">
-            <a:avLst/>
-          </a:prstGeom>
-          <a:noFill/>
-          <a:ln/>
-        </p:spPr>
-        <p:txBody>
-          <a:bodyPr wrap="square" lIns="0" tIns="0" rIns="0" bIns="0" rtlCol="0" anchor="ctr"/>
-          <a:lstStyle/>
-          <a:p>
-            <a:pPr algn="ctr" indent="0" marL="0">
-              <a:buNone/>
-            </a:pPr>
-            <a:r>
-              <a:rPr lang="en-US" sz="1000" dirty="0">
-                <a:solidFill>
-                  <a:srgbClr val="3A7DC9"/>
-                </a:solidFill>
-              </a:rPr>
-              <a:t>□</a:t>
-            </a:r>
-            <a:endParaRPr lang="en-US" sz="1000" dirty="0"/>
-          </a:p>
-        </p:txBody>
-      </p:sp>
-      <p:sp>
-        <p:nvSpPr>
-          <p:cNvPr id="61" name="Text 56"/>
-          <p:cNvSpPr/>
-          <p:nvPr/>
-        </p:nvSpPr>
-        <p:spPr>
-          <a:xfrm>
-            <a:off x="722376" y="4626864"/>
-            <a:ext cx="3648456" cy="219456"/>
-          </a:xfrm>
-          <a:prstGeom prst="rect">
-            <a:avLst/>
-          </a:prstGeom>
-          <a:noFill/>
-          <a:ln/>
-        </p:spPr>
-        <p:txBody>
-          <a:bodyPr wrap="square" lIns="0" tIns="0" rIns="0" bIns="0" rtlCol="0" anchor="ctr"/>
-          <a:lstStyle/>
-          <a:p>
-            <a:pPr indent="0" marL="0">
-              <a:buNone/>
-            </a:pPr>
-            <a:r>
-              <a:rPr lang="en-US" sz="1050" dirty="0">
-                <a:solidFill>
-                  <a:srgbClr val="1E2D3D"/>
-                </a:solidFill>
-              </a:rPr>
-              <a:t>Is audit trail instrumented?</a:t>
-            </a:r>
-            <a:endParaRPr lang="en-US" sz="1050" dirty="0"/>
-          </a:p>
-        </p:txBody>
-      </p:sp>
-      <p:sp>
-        <p:nvSpPr>
-          <p:cNvPr id="62" name="Shape 57"/>
-          <p:cNvSpPr/>
-          <p:nvPr/>
-        </p:nvSpPr>
-        <p:spPr>
-          <a:xfrm>
-            <a:off x="4663440" y="3090672"/>
-            <a:ext cx="4160520" cy="1773936"/>
-          </a:xfrm>
-          <a:prstGeom prst="rect">
-            <a:avLst/>
-          </a:prstGeom>
-          <a:solidFill>
-            <a:srgbClr val="F3F6F9"/>
-          </a:solidFill>
-          <a:ln/>
-          <a:effectLst>
-            <a:outerShdw sx="100000" sy="100000" kx="0" ky="0" algn="bl" rotWithShape="0" blurRad="101600" dist="38100" dir="8100000">
-              <a:srgbClr val="000000">
-                <a:alpha val="13000"/>
-              </a:srgbClr>
-            </a:outerShdw>
-          </a:effectLst>
-        </p:spPr>
-      </p:sp>
-      <p:sp>
-        <p:nvSpPr>
-          <p:cNvPr id="63" name="Shape 58"/>
-          <p:cNvSpPr/>
-          <p:nvPr/>
-        </p:nvSpPr>
-        <p:spPr>
-          <a:xfrm>
-            <a:off x="4663440" y="3090672"/>
-            <a:ext cx="4160520" cy="438912"/>
-          </a:xfrm>
-          <a:prstGeom prst="rect">
-            <a:avLst/>
-          </a:prstGeom>
-          <a:solidFill>
-            <a:srgbClr val="3A7E6E"/>
-          </a:solidFill>
-          <a:ln/>
-        </p:spPr>
-      </p:sp>
-      <p:pic>
-        <p:nvPicPr>
-          <p:cNvPr id="64" name="Image 3" descr="preencoded.png">    </p:cNvPr>
-          <p:cNvPicPr>
-            <a:picLocks noChangeAspect="1"/>
-          </p:cNvPicPr>
-          <p:nvPr/>
-        </p:nvPicPr>
-        <p:blipFill>
-          <a:blip r:embed="rId4"/>
-          <a:stretch>
-            <a:fillRect/>
-          </a:stretch>
-        </p:blipFill>
-        <p:spPr>
-          <a:xfrm>
-            <a:off x="4800600" y="3182112"/>
-            <a:ext cx="256032" cy="256032"/>
-          </a:xfrm>
-          <a:prstGeom prst="rect">
-            <a:avLst/>
-          </a:prstGeom>
-        </p:spPr>
-      </p:pic>
-      <p:sp>
-        <p:nvSpPr>
-          <p:cNvPr id="65" name="Text 59"/>
-          <p:cNvSpPr/>
-          <p:nvPr/>
-        </p:nvSpPr>
-        <p:spPr>
-          <a:xfrm>
-            <a:off x="5120640" y="3090672"/>
-            <a:ext cx="3611880" cy="438912"/>
-          </a:xfrm>
-          <a:prstGeom prst="rect">
-            <a:avLst/>
-          </a:prstGeom>
-          <a:noFill/>
-          <a:ln/>
-        </p:spPr>
-        <p:txBody>
-          <a:bodyPr wrap="square" lIns="0" tIns="0" rIns="0" bIns="0" rtlCol="0" anchor="ctr"/>
-          <a:lstStyle/>
-          <a:p>
-            <a:pPr indent="0" marL="0">
-              <a:buNone/>
-            </a:pPr>
-            <a:r>
-              <a:rPr lang="en-US" sz="1400" b="1" dirty="0">
-                <a:solidFill>
-                  <a:srgbClr val="FFFFFF"/>
-                </a:solidFill>
-              </a:rPr>
-              <a:t>FinOps</a:t>
-            </a:r>
-            <a:endParaRPr lang="en-US" sz="1400" dirty="0"/>
-          </a:p>
-        </p:txBody>
-      </p:sp>
-      <p:sp>
-        <p:nvSpPr>
-          <p:cNvPr id="66" name="Shape 60"/>
-          <p:cNvSpPr/>
-          <p:nvPr/>
-        </p:nvSpPr>
-        <p:spPr>
-          <a:xfrm>
-            <a:off x="4773168" y="3602736"/>
-            <a:ext cx="219456" cy="201168"/>
-          </a:xfrm>
-          <a:prstGeom prst="rect">
-            <a:avLst/>
-          </a:prstGeom>
-          <a:solidFill>
-            <a:srgbClr val="3A7E6E">
-              <a:alpha val="20000"/>
-            </a:srgbClr>
-          </a:solidFill>
-          <a:ln/>
-        </p:spPr>
-      </p:sp>
-      <p:sp>
-        <p:nvSpPr>
-          <p:cNvPr id="67" name="Text 61"/>
-          <p:cNvSpPr/>
-          <p:nvPr/>
-        </p:nvSpPr>
-        <p:spPr>
-          <a:xfrm>
-            <a:off x="4773168" y="3602736"/>
-            <a:ext cx="219456" cy="201168"/>
-          </a:xfrm>
-          <a:prstGeom prst="rect">
-            <a:avLst/>
-          </a:prstGeom>
-          <a:noFill/>
-          <a:ln/>
-        </p:spPr>
-        <p:txBody>
-          <a:bodyPr wrap="square" lIns="0" tIns="0" rIns="0" bIns="0" rtlCol="0" anchor="ctr"/>
-          <a:lstStyle/>
-          <a:p>
-            <a:pPr algn="ctr" indent="0" marL="0">
-              <a:buNone/>
-            </a:pPr>
-            <a:r>
-              <a:rPr lang="en-US" sz="1000" dirty="0">
-                <a:solidFill>
-                  <a:srgbClr val="3A7E6E"/>
-                </a:solidFill>
-              </a:rPr>
-              <a:t>□</a:t>
-            </a:r>
-            <a:endParaRPr lang="en-US" sz="1000" dirty="0"/>
-          </a:p>
-        </p:txBody>
-      </p:sp>
-      <p:sp>
-        <p:nvSpPr>
-          <p:cNvPr id="68" name="Text 62"/>
-          <p:cNvSpPr/>
-          <p:nvPr/>
-        </p:nvSpPr>
-        <p:spPr>
-          <a:xfrm>
-            <a:off x="5065776" y="3602736"/>
-            <a:ext cx="3648456" cy="219456"/>
-          </a:xfrm>
-          <a:prstGeom prst="rect">
-            <a:avLst/>
-          </a:prstGeom>
-          <a:noFill/>
-          <a:ln/>
-        </p:spPr>
-        <p:txBody>
-          <a:bodyPr wrap="square" lIns="0" tIns="0" rIns="0" bIns="0" rtlCol="0" anchor="ctr"/>
-          <a:lstStyle/>
-          <a:p>
-            <a:pPr indent="0" marL="0">
-              <a:buNone/>
-            </a:pPr>
-            <a:r>
-              <a:rPr lang="en-US" sz="1050" dirty="0">
-                <a:solidFill>
-                  <a:srgbClr val="1E2D3D"/>
-                </a:solidFill>
-              </a:rPr>
-              <a:t>Is cost-per-unit-of-work modelled?</a:t>
-            </a:r>
-            <a:endParaRPr lang="en-US" sz="1050" dirty="0"/>
-          </a:p>
-        </p:txBody>
-      </p:sp>
-      <p:sp>
-        <p:nvSpPr>
-          <p:cNvPr id="69" name="Shape 63"/>
-          <p:cNvSpPr/>
-          <p:nvPr/>
-        </p:nvSpPr>
-        <p:spPr>
-          <a:xfrm>
-            <a:off x="4773168" y="3858768"/>
-            <a:ext cx="219456" cy="201168"/>
-          </a:xfrm>
-          <a:prstGeom prst="rect">
-            <a:avLst/>
-          </a:prstGeom>
-          <a:solidFill>
-            <a:srgbClr val="3A7E6E">
-              <a:alpha val="20000"/>
-            </a:srgbClr>
-          </a:solidFill>
-          <a:ln/>
-        </p:spPr>
-      </p:sp>
-      <p:sp>
-        <p:nvSpPr>
-          <p:cNvPr id="70" name="Text 64"/>
-          <p:cNvSpPr/>
-          <p:nvPr/>
-        </p:nvSpPr>
-        <p:spPr>
-          <a:xfrm>
-            <a:off x="4773168" y="3858768"/>
-            <a:ext cx="219456" cy="201168"/>
-          </a:xfrm>
-          <a:prstGeom prst="rect">
-            <a:avLst/>
-          </a:prstGeom>
-          <a:noFill/>
-          <a:ln/>
-        </p:spPr>
-        <p:txBody>
-          <a:bodyPr wrap="square" lIns="0" tIns="0" rIns="0" bIns="0" rtlCol="0" anchor="ctr"/>
-          <a:lstStyle/>
-          <a:p>
-            <a:pPr algn="ctr" indent="0" marL="0">
-              <a:buNone/>
-            </a:pPr>
-            <a:r>
-              <a:rPr lang="en-US" sz="1000" dirty="0">
-                <a:solidFill>
-                  <a:srgbClr val="3A7E6E"/>
-                </a:solidFill>
-              </a:rPr>
-              <a:t>□</a:t>
-            </a:r>
-            <a:endParaRPr lang="en-US" sz="1000" dirty="0"/>
-          </a:p>
-        </p:txBody>
-      </p:sp>
-      <p:sp>
-        <p:nvSpPr>
-          <p:cNvPr id="71" name="Text 65"/>
-          <p:cNvSpPr/>
-          <p:nvPr/>
-        </p:nvSpPr>
-        <p:spPr>
-          <a:xfrm>
-            <a:off x="5065776" y="3858768"/>
-            <a:ext cx="3648456" cy="219456"/>
-          </a:xfrm>
-          <a:prstGeom prst="rect">
-            <a:avLst/>
-          </a:prstGeom>
-          <a:noFill/>
-          <a:ln/>
-        </p:spPr>
-        <p:txBody>
-          <a:bodyPr wrap="square" lIns="0" tIns="0" rIns="0" bIns="0" rtlCol="0" anchor="ctr"/>
-          <a:lstStyle/>
-          <a:p>
-            <a:pPr indent="0" marL="0">
-              <a:buNone/>
-            </a:pPr>
-            <a:r>
-              <a:rPr lang="en-US" sz="1050" dirty="0">
-                <a:solidFill>
-                  <a:srgbClr val="1E2D3D"/>
-                </a:solidFill>
-              </a:rPr>
-              <a:t>Is model routing designed (not one model for all)?</a:t>
-            </a:r>
-            <a:endParaRPr lang="en-US" sz="1050" dirty="0"/>
-          </a:p>
-        </p:txBody>
-      </p:sp>
-      <p:sp>
-        <p:nvSpPr>
-          <p:cNvPr id="72" name="Shape 66"/>
-          <p:cNvSpPr/>
-          <p:nvPr/>
-        </p:nvSpPr>
-        <p:spPr>
-          <a:xfrm>
-            <a:off x="4773168" y="4114800"/>
-            <a:ext cx="219456" cy="201168"/>
-          </a:xfrm>
-          <a:prstGeom prst="rect">
-            <a:avLst/>
-          </a:prstGeom>
-          <a:solidFill>
-            <a:srgbClr val="3A7E6E">
-              <a:alpha val="20000"/>
-            </a:srgbClr>
-          </a:solidFill>
-          <a:ln/>
-        </p:spPr>
-      </p:sp>
-      <p:sp>
-        <p:nvSpPr>
-          <p:cNvPr id="73" name="Text 67"/>
-          <p:cNvSpPr/>
-          <p:nvPr/>
-        </p:nvSpPr>
-        <p:spPr>
-          <a:xfrm>
-            <a:off x="4773168" y="4114800"/>
-            <a:ext cx="219456" cy="201168"/>
-          </a:xfrm>
-          <a:prstGeom prst="rect">
-            <a:avLst/>
-          </a:prstGeom>
-          <a:noFill/>
-          <a:ln/>
-        </p:spPr>
-        <p:txBody>
-          <a:bodyPr wrap="square" lIns="0" tIns="0" rIns="0" bIns="0" rtlCol="0" anchor="ctr"/>
-          <a:lstStyle/>
-          <a:p>
-            <a:pPr algn="ctr" indent="0" marL="0">
-              <a:buNone/>
-            </a:pPr>
-            <a:r>
-              <a:rPr lang="en-US" sz="1000" dirty="0">
-                <a:solidFill>
-                  <a:srgbClr val="3A7E6E"/>
-                </a:solidFill>
-              </a:rPr>
-              <a:t>□</a:t>
-            </a:r>
-            <a:endParaRPr lang="en-US" sz="1000" dirty="0"/>
-          </a:p>
-        </p:txBody>
-      </p:sp>
-      <p:sp>
-        <p:nvSpPr>
-          <p:cNvPr id="74" name="Text 68"/>
-          <p:cNvSpPr/>
-          <p:nvPr/>
-        </p:nvSpPr>
-        <p:spPr>
-          <a:xfrm>
-            <a:off x="5065776" y="4114800"/>
-            <a:ext cx="3648456" cy="219456"/>
-          </a:xfrm>
-          <a:prstGeom prst="rect">
-            <a:avLst/>
-          </a:prstGeom>
-          <a:noFill/>
-          <a:ln/>
-        </p:spPr>
-        <p:txBody>
-          <a:bodyPr wrap="square" lIns="0" tIns="0" rIns="0" bIns="0" rtlCol="0" anchor="ctr"/>
-          <a:lstStyle/>
-          <a:p>
-            <a:pPr indent="0" marL="0">
-              <a:buNone/>
-            </a:pPr>
-            <a:r>
-              <a:rPr lang="en-US" sz="1050" dirty="0">
-                <a:solidFill>
-                  <a:srgbClr val="1E2D3D"/>
-                </a:solidFill>
-              </a:rPr>
-              <a:t>Are compaction thresholds defined?</a:t>
-            </a:r>
-            <a:endParaRPr lang="en-US" sz="1050" dirty="0"/>
-          </a:p>
-        </p:txBody>
-      </p:sp>
-      <p:sp>
-        <p:nvSpPr>
-          <p:cNvPr id="75" name="Shape 69"/>
-          <p:cNvSpPr/>
-          <p:nvPr/>
-        </p:nvSpPr>
-        <p:spPr>
-          <a:xfrm>
-            <a:off x="4773168" y="4370832"/>
-            <a:ext cx="219456" cy="201168"/>
-          </a:xfrm>
-          <a:prstGeom prst="rect">
-            <a:avLst/>
-          </a:prstGeom>
-          <a:solidFill>
-            <a:srgbClr val="3A7E6E">
-              <a:alpha val="20000"/>
-            </a:srgbClr>
-          </a:solidFill>
-          <a:ln/>
-        </p:spPr>
-      </p:sp>
-      <p:sp>
-        <p:nvSpPr>
-          <p:cNvPr id="76" name="Text 70"/>
-          <p:cNvSpPr/>
-          <p:nvPr/>
-        </p:nvSpPr>
-        <p:spPr>
-          <a:xfrm>
-            <a:off x="4773168" y="4370832"/>
-            <a:ext cx="219456" cy="201168"/>
-          </a:xfrm>
-          <a:prstGeom prst="rect">
-            <a:avLst/>
-          </a:prstGeom>
-          <a:noFill/>
-          <a:ln/>
-        </p:spPr>
-        <p:txBody>
-          <a:bodyPr wrap="square" lIns="0" tIns="0" rIns="0" bIns="0" rtlCol="0" anchor="ctr"/>
-          <a:lstStyle/>
-          <a:p>
-            <a:pPr algn="ctr" indent="0" marL="0">
-              <a:buNone/>
-            </a:pPr>
-            <a:r>
-              <a:rPr lang="en-US" sz="1000" dirty="0">
-                <a:solidFill>
-                  <a:srgbClr val="3A7E6E"/>
-                </a:solidFill>
-              </a:rPr>
-              <a:t>□</a:t>
-            </a:r>
-            <a:endParaRPr lang="en-US" sz="1000" dirty="0"/>
-          </a:p>
-        </p:txBody>
-      </p:sp>
-      <p:sp>
-        <p:nvSpPr>
-          <p:cNvPr id="77" name="Text 71"/>
-          <p:cNvSpPr/>
-          <p:nvPr/>
-        </p:nvSpPr>
-        <p:spPr>
-          <a:xfrm>
-            <a:off x="5065776" y="4370832"/>
-            <a:ext cx="3648456" cy="219456"/>
-          </a:xfrm>
-          <a:prstGeom prst="rect">
-            <a:avLst/>
-          </a:prstGeom>
-          <a:noFill/>
-          <a:ln/>
-        </p:spPr>
-        <p:txBody>
-          <a:bodyPr wrap="square" lIns="0" tIns="0" rIns="0" bIns="0" rtlCol="0" anchor="ctr"/>
-          <a:lstStyle/>
-          <a:p>
-            <a:pPr indent="0" marL="0">
-              <a:buNone/>
-            </a:pPr>
-            <a:r>
-              <a:rPr lang="en-US" sz="1050" dirty="0">
-                <a:solidFill>
-                  <a:srgbClr val="1E2D3D"/>
-                </a:solidFill>
-              </a:rPr>
-              <a:t>Are token budget limits set at gateway?</a:t>
-            </a:r>
-            <a:endParaRPr lang="en-US" sz="1050" dirty="0"/>
-          </a:p>
-        </p:txBody>
-      </p:sp>
-      <p:sp>
-        <p:nvSpPr>
-          <p:cNvPr id="78" name="Shape 72"/>
-          <p:cNvSpPr/>
-          <p:nvPr/>
-        </p:nvSpPr>
-        <p:spPr>
-          <a:xfrm>
-            <a:off x="4773168" y="4626864"/>
-            <a:ext cx="219456" cy="201168"/>
-          </a:xfrm>
-          <a:prstGeom prst="rect">
-            <a:avLst/>
-          </a:prstGeom>
-          <a:solidFill>
-            <a:srgbClr val="3A7E6E">
-              <a:alpha val="20000"/>
-            </a:srgbClr>
-          </a:solidFill>
-          <a:ln/>
-        </p:spPr>
-      </p:sp>
-      <p:sp>
-        <p:nvSpPr>
-          <p:cNvPr id="79" name="Text 73"/>
-          <p:cNvSpPr/>
-          <p:nvPr/>
-        </p:nvSpPr>
-        <p:spPr>
-          <a:xfrm>
-            <a:off x="4773168" y="4626864"/>
-            <a:ext cx="219456" cy="201168"/>
-          </a:xfrm>
-          <a:prstGeom prst="rect">
-            <a:avLst/>
-          </a:prstGeom>
-          <a:noFill/>
-          <a:ln/>
-        </p:spPr>
-        <p:txBody>
-          <a:bodyPr wrap="square" lIns="0" tIns="0" rIns="0" bIns="0" rtlCol="0" anchor="ctr"/>
-          <a:lstStyle/>
-          <a:p>
-            <a:pPr algn="ctr" indent="0" marL="0">
-              <a:buNone/>
-            </a:pPr>
-            <a:r>
-              <a:rPr lang="en-US" sz="1000" dirty="0">
-                <a:solidFill>
-                  <a:srgbClr val="3A7E6E"/>
-                </a:solidFill>
-              </a:rPr>
-              <a:t>□</a:t>
-            </a:r>
-            <a:endParaRPr lang="en-US" sz="1000" dirty="0"/>
-          </a:p>
-        </p:txBody>
-      </p:sp>
-      <p:sp>
-        <p:nvSpPr>
-          <p:cNvPr id="80" name="Text 74"/>
-          <p:cNvSpPr/>
-          <p:nvPr/>
-        </p:nvSpPr>
-        <p:spPr>
-          <a:xfrm>
-            <a:off x="5065776" y="4626864"/>
-            <a:ext cx="3648456" cy="219456"/>
-          </a:xfrm>
-          <a:prstGeom prst="rect">
-            <a:avLst/>
-          </a:prstGeom>
-          <a:noFill/>
-          <a:ln/>
-        </p:spPr>
-        <p:txBody>
-          <a:bodyPr wrap="square" lIns="0" tIns="0" rIns="0" bIns="0" rtlCol="0" anchor="ctr"/>
-          <a:lstStyle/>
-          <a:p>
-            <a:pPr indent="0" marL="0">
-              <a:buNone/>
-            </a:pPr>
-            <a:r>
-              <a:rPr lang="en-US" sz="1050" dirty="0">
-                <a:solidFill>
-                  <a:srgbClr val="1E2D3D"/>
-                </a:solidFill>
-              </a:rPr>
-              <a:t>Are cost alerts and throttle thresholds configured?</a:t>
-            </a:r>
-            <a:endParaRPr lang="en-US" sz="1050" dirty="0"/>
+              <a:t>▶  Same vocabulary. Same review discipline. Different blast radius.</a:t>
+            </a:r>
+            <a:endParaRPr lang="en-US" sz="1200" dirty="0"/>
           </a:p>
         </p:txBody>
       </p:sp>
@@ -11634,7 +10297,7 @@
                   <a:srgbClr val="5B8DB8"/>
                 </a:solidFill>
               </a:rPr>
-              <a:t>PRE-DEPLOYMENT DESIGN REVIEW  —  FULL CHECKLIST</a:t>
+              <a:t>FULL 12-POINT CHECKLIST  —  PRODUCTION AGENT SYSTEMS</a:t>
             </a:r>
             <a:endParaRPr lang="en-US" sz="1300" dirty="0"/>
           </a:p>
@@ -11665,14 +10328,14 @@
               <a:buNone/>
             </a:pPr>
             <a:r>
-              <a:rPr lang="en-US" sz="1600" i="1" dirty="0">
-                <a:solidFill>
-                  <a:srgbClr val="FFFFFF"/>
-                </a:solidFill>
-              </a:rPr>
-              <a:t>This is the complete gate. Every unchecked item is a known gap entering production.</a:t>
-            </a:r>
-            <a:endParaRPr lang="en-US" sz="1600" dirty="0"/>
+              <a:rPr lang="en-US" sz="1350" i="1" dirty="0">
+                <a:solidFill>
+                  <a:srgbClr val="D4E4F0"/>
+                </a:solidFill>
+              </a:rPr>
+              <a:t>Production agents: full 12 items required.  Coding agent workflows: use the lightweight subset — items 01, 04, 05, 06, 07, 10.</a:t>
+            </a:r>
+            <a:endParaRPr lang="en-US" sz="1350" dirty="0"/>
           </a:p>
         </p:txBody>
       </p:sp>

--- a/slides/Module_10_Design_Reviews.pptx
+++ b/slides/Module_10_Design_Reviews.pptx
@@ -3705,7 +3705,7 @@
                   <a:srgbClr val="7A90A8"/>
                 </a:solidFill>
               </a:rPr>
-              <a:t>The goal of this training programme: move your teams from Level 2 to Level 3 within 90 days, with a clear path to Level 4.</a:t>
+              <a:t>The goal of this training program: move your teams from Level 2 to Level 3 within 90 days, with a clear path to Level 4.</a:t>
             </a:r>
             <a:endParaRPr lang="en-US" sz="1100" dirty="0"/>
           </a:p>
@@ -4988,7 +4988,7 @@
                   <a:srgbClr val="5B8DB8"/>
                 </a:solidFill>
               </a:rPr>
-              <a:t>PROGRAMME WRAP-UP  ·  MODULE 10 SUMMARY</a:t>
+              <a:t>PROGRAM WRAP-UP  ·  MODULE 10 SUMMARY</a:t>
             </a:r>
             <a:endParaRPr lang="en-US" sz="1300" dirty="0"/>
           </a:p>
@@ -5518,7 +5518,7 @@
                   <a:srgbClr val="FFFFFF"/>
                 </a:solidFill>
               </a:rPr>
-              <a:t>✅  Programme Complete  ·  Enterprise Agentic Practices  ·  10 Modules  ·  Delivered</a:t>
+              <a:t>✅  Program Complete  ·  Enterprise Agentic Practices  ·  10 Modules  ·  Delivered</a:t>
             </a:r>
             <a:endParaRPr lang="en-US" sz="1400" dirty="0"/>
           </a:p>
@@ -6954,7 +6954,7 @@
                   <a:srgbClr val="D4E4F0"/>
                 </a:solidFill>
               </a:rPr>
-              <a:t>How you organise the project communicates intent to the agent. CLAUDE.md at root, specs in /specs, ADRs in /adr, agent docs in /agent_docs. Structure first, then prompt.</a:t>
+              <a:t>How you organize the project communicates intent to the agent. CLAUDE.md at root, specs in /specs, ADRs in /adr, agent docs in /agent_docs. Structure first, then prompt.</a:t>
             </a:r>
             <a:endParaRPr lang="en-US" sz="1050" dirty="0"/>
           </a:p>
@@ -13814,7 +13814,7 @@
                   <a:srgbClr val="3A7E6E"/>
                 </a:solidFill>
               </a:rPr>
-              <a:t>✓ Observability is a design artefact, not an operational afterthought. Specify what to trace in the design doc.</a:t>
+              <a:t>✓ Observability is a design artifact, not an operational afterthought. Specify what to trace in the design doc.</a:t>
             </a:r>
             <a:endParaRPr lang="en-US" sz="1050" dirty="0"/>
           </a:p>

--- a/slides/Module_10_Design_Reviews.pptx
+++ b/slides/Module_10_Design_Reviews.pptx
@@ -3525,7 +3525,7 @@
                   <a:srgbClr val="FFFFFF"/>
                 </a:solidFill>
               </a:rPr>
-              <a:t>Optimised</a:t>
+              <a:t>Optimized</a:t>
             </a:r>
             <a:endParaRPr lang="en-US" sz="1300" dirty="0"/>
           </a:p>
@@ -4709,7 +4709,7 @@
                   <a:srgbClr val="7A90A8"/>
                 </a:solidFill>
               </a:rPr>
-              <a:t>Identify your top 3 OWASP threats with mitigations and owners. Estimate $/day at 1,000 runs. Identify the highest-ROI cost optimisation lever. (Coding-agent track: estimate cost-per-session and set a budget cap.)</a:t>
+              <a:t>Identify your top 3 OWASP threats with mitigations and owners. Estimate $/day at 1,000 runs. Identify the highest-ROI cost optimization lever. (Coding-agent track: estimate cost-per-session and set a budget cap.)</a:t>
             </a:r>
             <a:endParaRPr lang="en-US" sz="1050" dirty="0"/>
           </a:p>
@@ -5153,7 +5153,7 @@
                   <a:srgbClr val="D4E4F0"/>
                 </a:solidFill>
               </a:rPr>
-              <a:t>M04: Spec-Driven Development — PRD → Spec → Plan → Code</a:t>
+              <a:t>M04: Product Documentation — rules files, PRODUCT.md, ADRs, README</a:t>
             </a:r>
             <a:endParaRPr lang="en-US" sz="1100" dirty="0"/>
           </a:p>
@@ -5167,7 +5167,7 @@
                   <a:srgbClr val="D4E4F0"/>
                 </a:solidFill>
               </a:rPr>
-              <a:t>M05: Testing &amp; CI/CD — verifiers, judges, feedback loops</a:t>
+              <a:t>M05: Automated Testing — TDD, coverage ≥85%, AC-to-test pipeline</a:t>
             </a:r>
             <a:endParaRPr lang="en-US" sz="1100" dirty="0"/>
           </a:p>
@@ -5181,7 +5181,7 @@
                   <a:srgbClr val="D4E4F0"/>
                 </a:solidFill>
               </a:rPr>
-              <a:t>M06: Review Cycles — HITL, hygiene, continuous improvement</a:t>
+              <a:t>M06: Spec-Driven Development — PRD → Spec → Plan → Code</a:t>
             </a:r>
             <a:endParaRPr lang="en-US" sz="1100" dirty="0"/>
           </a:p>
@@ -5195,7 +5195,7 @@
                   <a:srgbClr val="D4E4F0"/>
                 </a:solidFill>
               </a:rPr>
-              <a:t>M07: Observability — tracing, logging, evaluation, metrics</a:t>
+              <a:t>M07: Review Cycles — HITL, verifiers, evaluators, feedback loops</a:t>
             </a:r>
             <a:endParaRPr lang="en-US" sz="1100" dirty="0"/>
           </a:p>
@@ -5209,7 +5209,7 @@
                   <a:srgbClr val="D4E4F0"/>
                 </a:solidFill>
               </a:rPr>
-              <a:t>M08: Security — identity, sandboxing, OWASP, kill switches</a:t>
+              <a:t>M08: Review Hygiene — HITL tiers, ADRs, improvement loop</a:t>
             </a:r>
             <a:endParaRPr lang="en-US" sz="1100" dirty="0"/>
           </a:p>
@@ -5223,7 +5223,7 @@
                   <a:srgbClr val="D4E4F0"/>
                 </a:solidFill>
               </a:rPr>
-              <a:t>M09: FinOps — token economics, routing, governance</a:t>
+              <a:t>M09: Observability — logs, metrics, traces, events, health</a:t>
             </a:r>
             <a:endParaRPr lang="en-US" sz="1100" dirty="0"/>
           </a:p>
@@ -5237,7 +5237,7 @@
                   <a:srgbClr val="D4E4F0"/>
                 </a:solidFill>
               </a:rPr>
-              <a:t>M10: Design Reviews — AX, ADRs, maturity model</a:t>
+              <a:t>M10: Design Reviews — design principles, security &amp; FinOps review, 12-point checklist</a:t>
             </a:r>
             <a:endParaRPr lang="en-US" sz="1100" dirty="0"/>
           </a:p>
@@ -7706,7 +7706,7 @@
                   <a:srgbClr val="1E2D3D"/>
                 </a:solidFill>
               </a:rPr>
-              <a:t>llms.txt is an emerging standard (like robots.txt) that summarises what an LLM needs to know about a site or service in a compact, LLM-optimised format.</a:t>
+              <a:t>llms.txt is an emerging standard (like robots.txt) that summarises what an LLM needs to know about a site or service in a compact, LLM-optimized format.</a:t>
             </a:r>
             <a:endParaRPr lang="en-US" sz="1050" dirty="0"/>
           </a:p>
@@ -15919,7 +15919,7 @@
                   <a:srgbClr val="FFFFFF"/>
                 </a:solidFill>
               </a:rPr>
-              <a:t>Optimise</a:t>
+              <a:t>Optimize</a:t>
             </a:r>
             <a:endParaRPr lang="en-US" sz="1600" dirty="0"/>
           </a:p>
